--- a/lv_readings/images/ctt.pptx
+++ b/lv_readings/images/ctt.pptx
@@ -247,7 +247,7 @@
           <a:p>
             <a:fld id="{03831E2C-BFD0-4A74-B62A-BA7494EC057D}" type="datetimeFigureOut">
               <a:rPr lang="en-GB" smtClean="0"/>
-              <a:t>07/10/2025</a:t>
+              <a:t>10/11/2025</a:t>
             </a:fld>
             <a:endParaRPr lang="en-GB"/>
           </a:p>
@@ -417,7 +417,7 @@
           <a:p>
             <a:fld id="{03831E2C-BFD0-4A74-B62A-BA7494EC057D}" type="datetimeFigureOut">
               <a:rPr lang="en-GB" smtClean="0"/>
-              <a:t>07/10/2025</a:t>
+              <a:t>10/11/2025</a:t>
             </a:fld>
             <a:endParaRPr lang="en-GB"/>
           </a:p>
@@ -597,7 +597,7 @@
           <a:p>
             <a:fld id="{03831E2C-BFD0-4A74-B62A-BA7494EC057D}" type="datetimeFigureOut">
               <a:rPr lang="en-GB" smtClean="0"/>
-              <a:t>07/10/2025</a:t>
+              <a:t>10/11/2025</a:t>
             </a:fld>
             <a:endParaRPr lang="en-GB"/>
           </a:p>
@@ -767,7 +767,7 @@
           <a:p>
             <a:fld id="{03831E2C-BFD0-4A74-B62A-BA7494EC057D}" type="datetimeFigureOut">
               <a:rPr lang="en-GB" smtClean="0"/>
-              <a:t>07/10/2025</a:t>
+              <a:t>10/11/2025</a:t>
             </a:fld>
             <a:endParaRPr lang="en-GB"/>
           </a:p>
@@ -1013,7 +1013,7 @@
           <a:p>
             <a:fld id="{03831E2C-BFD0-4A74-B62A-BA7494EC057D}" type="datetimeFigureOut">
               <a:rPr lang="en-GB" smtClean="0"/>
-              <a:t>07/10/2025</a:t>
+              <a:t>10/11/2025</a:t>
             </a:fld>
             <a:endParaRPr lang="en-GB"/>
           </a:p>
@@ -1245,7 +1245,7 @@
           <a:p>
             <a:fld id="{03831E2C-BFD0-4A74-B62A-BA7494EC057D}" type="datetimeFigureOut">
               <a:rPr lang="en-GB" smtClean="0"/>
-              <a:t>07/10/2025</a:t>
+              <a:t>10/11/2025</a:t>
             </a:fld>
             <a:endParaRPr lang="en-GB"/>
           </a:p>
@@ -1612,7 +1612,7 @@
           <a:p>
             <a:fld id="{03831E2C-BFD0-4A74-B62A-BA7494EC057D}" type="datetimeFigureOut">
               <a:rPr lang="en-GB" smtClean="0"/>
-              <a:t>07/10/2025</a:t>
+              <a:t>10/11/2025</a:t>
             </a:fld>
             <a:endParaRPr lang="en-GB"/>
           </a:p>
@@ -1730,7 +1730,7 @@
           <a:p>
             <a:fld id="{03831E2C-BFD0-4A74-B62A-BA7494EC057D}" type="datetimeFigureOut">
               <a:rPr lang="en-GB" smtClean="0"/>
-              <a:t>07/10/2025</a:t>
+              <a:t>10/11/2025</a:t>
             </a:fld>
             <a:endParaRPr lang="en-GB"/>
           </a:p>
@@ -1825,7 +1825,7 @@
           <a:p>
             <a:fld id="{03831E2C-BFD0-4A74-B62A-BA7494EC057D}" type="datetimeFigureOut">
               <a:rPr lang="en-GB" smtClean="0"/>
-              <a:t>07/10/2025</a:t>
+              <a:t>10/11/2025</a:t>
             </a:fld>
             <a:endParaRPr lang="en-GB"/>
           </a:p>
@@ -2102,7 +2102,7 @@
           <a:p>
             <a:fld id="{03831E2C-BFD0-4A74-B62A-BA7494EC057D}" type="datetimeFigureOut">
               <a:rPr lang="en-GB" smtClean="0"/>
-              <a:t>07/10/2025</a:t>
+              <a:t>10/11/2025</a:t>
             </a:fld>
             <a:endParaRPr lang="en-GB"/>
           </a:p>
@@ -2359,7 +2359,7 @@
           <a:p>
             <a:fld id="{03831E2C-BFD0-4A74-B62A-BA7494EC057D}" type="datetimeFigureOut">
               <a:rPr lang="en-GB" smtClean="0"/>
-              <a:t>07/10/2025</a:t>
+              <a:t>10/11/2025</a:t>
             </a:fld>
             <a:endParaRPr lang="en-GB"/>
           </a:p>
@@ -2572,7 +2572,7 @@
           <a:p>
             <a:fld id="{03831E2C-BFD0-4A74-B62A-BA7494EC057D}" type="datetimeFigureOut">
               <a:rPr lang="en-GB" smtClean="0"/>
-              <a:t>07/10/2025</a:t>
+              <a:t>10/11/2025</a:t>
             </a:fld>
             <a:endParaRPr lang="en-GB"/>
           </a:p>
@@ -4269,7 +4269,7 @@
                   <a:schemeClr val="tx1"/>
                 </a:solidFill>
               </a:rPr>
-              <a:t>ERROR</a:t>
+              <a:t>ERROR 1</a:t>
             </a:r>
           </a:p>
         </p:txBody>
@@ -4659,7 +4659,7 @@
                   <a:schemeClr val="tx1"/>
                 </a:solidFill>
               </a:rPr>
-              <a:t>ERROR</a:t>
+              <a:t>ERROR 2</a:t>
             </a:r>
           </a:p>
         </p:txBody>
@@ -5024,7 +5024,7 @@
             <p:spPr>
               <a:xfrm>
                 <a:off x="11342176" y="1624499"/>
-                <a:ext cx="571182" cy="373179"/>
+                <a:ext cx="493084" cy="373179"/>
               </a:xfrm>
               <a:prstGeom prst="rect">
                 <a:avLst/>
@@ -5068,12 +5068,6 @@
                             </a:rPr>
                             <m:t>𝐸</m:t>
                           </m:r>
-                          <m:r>
-                            <a:rPr lang="en-GB" b="0" i="1" smtClean="0">
-                              <a:latin typeface="Cambria Math" panose="02040503050406030204" pitchFamily="18" charset="0"/>
-                            </a:rPr>
-                            <m:t>1</m:t>
-                          </m:r>
                         </m:sub>
                         <m:sup>
                           <m:r>
@@ -5110,7 +5104,7 @@
             <p:spPr>
               <a:xfrm>
                 <a:off x="11342176" y="1624499"/>
-                <a:ext cx="571182" cy="373179"/>
+                <a:ext cx="493084" cy="373179"/>
               </a:xfrm>
               <a:prstGeom prst="rect">
                 <a:avLst/>
@@ -5154,7 +5148,7 @@
             <p:spPr>
               <a:xfrm>
                 <a:off x="11342176" y="3667687"/>
-                <a:ext cx="571182" cy="373179"/>
+                <a:ext cx="493084" cy="373179"/>
               </a:xfrm>
               <a:prstGeom prst="rect">
                 <a:avLst/>
@@ -5198,12 +5192,6 @@
                             </a:rPr>
                             <m:t>𝐸</m:t>
                           </m:r>
-                          <m:r>
-                            <a:rPr lang="en-GB" b="0" i="1" smtClean="0">
-                              <a:latin typeface="Cambria Math" panose="02040503050406030204" pitchFamily="18" charset="0"/>
-                            </a:rPr>
-                            <m:t>2</m:t>
-                          </m:r>
                         </m:sub>
                         <m:sup>
                           <m:r>
@@ -5240,7 +5228,7 @@
             <p:spPr>
               <a:xfrm>
                 <a:off x="11342176" y="3667687"/>
-                <a:ext cx="571182" cy="373179"/>
+                <a:ext cx="493084" cy="373179"/>
               </a:xfrm>
               <a:prstGeom prst="rect">
                 <a:avLst/>
@@ -5750,8 +5738,8 @@
           </a:fontRef>
         </p:style>
       </p:cxnSp>
-      <mc:AlternateContent xmlns:mc="http://schemas.openxmlformats.org/markup-compatibility/2006">
-        <mc:Choice xmlns:a14="http://schemas.microsoft.com/office/drawing/2010/main" Requires="a14">
+      <mc:AlternateContent xmlns:mc="http://schemas.openxmlformats.org/markup-compatibility/2006" xmlns:a14="http://schemas.microsoft.com/office/drawing/2010/main">
+        <mc:Choice Requires="a14">
           <p:sp>
             <p:nvSpPr>
               <p:cNvPr id="21" name="TextBox 20">
@@ -5829,7 +5817,7 @@
             </p:txBody>
           </p:sp>
         </mc:Choice>
-        <mc:Fallback>
+        <mc:Fallback xmlns="">
           <p:sp>
             <p:nvSpPr>
               <p:cNvPr id="21" name="TextBox 20">
@@ -5874,8 +5862,8 @@
           </p:sp>
         </mc:Fallback>
       </mc:AlternateContent>
-      <mc:AlternateContent xmlns:mc="http://schemas.openxmlformats.org/markup-compatibility/2006">
-        <mc:Choice xmlns:a14="http://schemas.microsoft.com/office/drawing/2010/main" Requires="a14">
+      <mc:AlternateContent xmlns:mc="http://schemas.openxmlformats.org/markup-compatibility/2006" xmlns:a14="http://schemas.microsoft.com/office/drawing/2010/main">
+        <mc:Choice Requires="a14">
           <p:sp>
             <p:nvSpPr>
               <p:cNvPr id="22" name="TextBox 21">
@@ -5953,7 +5941,7 @@
             </p:txBody>
           </p:sp>
         </mc:Choice>
-        <mc:Fallback>
+        <mc:Fallback xmlns="">
           <p:sp>
             <p:nvSpPr>
               <p:cNvPr id="22" name="TextBox 21">
@@ -6532,8 +6520,8 @@
           </a:fontRef>
         </p:style>
       </p:cxnSp>
-      <mc:AlternateContent xmlns:mc="http://schemas.openxmlformats.org/markup-compatibility/2006">
-        <mc:Choice xmlns:a14="http://schemas.microsoft.com/office/drawing/2010/main" Requires="a14">
+      <mc:AlternateContent xmlns:mc="http://schemas.openxmlformats.org/markup-compatibility/2006" xmlns:a14="http://schemas.microsoft.com/office/drawing/2010/main">
+        <mc:Choice Requires="a14">
           <p:sp>
             <p:nvSpPr>
               <p:cNvPr id="21" name="TextBox 20">
@@ -6611,7 +6599,7 @@
             </p:txBody>
           </p:sp>
         </mc:Choice>
-        <mc:Fallback>
+        <mc:Fallback xmlns="">
           <p:sp>
             <p:nvSpPr>
               <p:cNvPr id="21" name="TextBox 20">
@@ -6656,8 +6644,8 @@
           </p:sp>
         </mc:Fallback>
       </mc:AlternateContent>
-      <mc:AlternateContent xmlns:mc="http://schemas.openxmlformats.org/markup-compatibility/2006">
-        <mc:Choice xmlns:a14="http://schemas.microsoft.com/office/drawing/2010/main" Requires="a14">
+      <mc:AlternateContent xmlns:mc="http://schemas.openxmlformats.org/markup-compatibility/2006" xmlns:a14="http://schemas.microsoft.com/office/drawing/2010/main">
+        <mc:Choice Requires="a14">
           <p:sp>
             <p:nvSpPr>
               <p:cNvPr id="22" name="TextBox 21">
@@ -6735,7 +6723,7 @@
             </p:txBody>
           </p:sp>
         </mc:Choice>
-        <mc:Fallback>
+        <mc:Fallback xmlns="">
           <p:sp>
             <p:nvSpPr>
               <p:cNvPr id="22" name="TextBox 21">
@@ -6835,6 +6823,9 @@
                     <a:schemeClr val="tx1"/>
                   </a:solidFill>
                 </a:ln>
+                <a:solidFill>
+                  <a:schemeClr val="tx1"/>
+                </a:solidFill>
               </a:rPr>
               <a:t>0</a:t>
             </a:r>
@@ -6859,6 +6850,114 @@
         <p:spPr>
           <a:xfrm>
             <a:off x="9974449" y="588579"/>
+            <a:ext cx="1" cy="649065"/>
+          </a:xfrm>
+          <a:prstGeom prst="straightConnector1">
+            <a:avLst/>
+          </a:prstGeom>
+          <a:ln w="38100">
+            <a:solidFill>
+              <a:schemeClr val="tx1"/>
+            </a:solidFill>
+            <a:tailEnd type="triangle"/>
+          </a:ln>
+        </p:spPr>
+        <p:style>
+          <a:lnRef idx="1">
+            <a:schemeClr val="accent1"/>
+          </a:lnRef>
+          <a:fillRef idx="0">
+            <a:schemeClr val="accent1"/>
+          </a:fillRef>
+          <a:effectRef idx="0">
+            <a:schemeClr val="accent1"/>
+          </a:effectRef>
+          <a:fontRef idx="minor">
+            <a:schemeClr val="tx1"/>
+          </a:fontRef>
+        </p:style>
+      </p:cxnSp>
+      <p:sp>
+        <p:nvSpPr>
+          <p:cNvPr id="16" name="Isosceles Triangle 15">
+            <a:extLst>
+              <a:ext uri="{FF2B5EF4-FFF2-40B4-BE49-F238E27FC236}">
+                <a16:creationId xmlns:a16="http://schemas.microsoft.com/office/drawing/2014/main" id="{675DED1C-29CC-44F7-897D-DE9184E32BD4}"/>
+              </a:ext>
+            </a:extLst>
+          </p:cNvPr>
+          <p:cNvSpPr/>
+          <p:nvPr/>
+        </p:nvSpPr>
+        <p:spPr>
+          <a:xfrm>
+            <a:off x="1881219" y="136634"/>
+            <a:ext cx="672662" cy="451945"/>
+          </a:xfrm>
+          <a:prstGeom prst="triangle">
+            <a:avLst/>
+          </a:prstGeom>
+          <a:noFill/>
+          <a:ln w="38100">
+            <a:solidFill>
+              <a:schemeClr val="tx1"/>
+            </a:solidFill>
+          </a:ln>
+        </p:spPr>
+        <p:style>
+          <a:lnRef idx="2">
+            <a:schemeClr val="accent1">
+              <a:shade val="50000"/>
+            </a:schemeClr>
+          </a:lnRef>
+          <a:fillRef idx="1">
+            <a:schemeClr val="accent1"/>
+          </a:fillRef>
+          <a:effectRef idx="0">
+            <a:schemeClr val="accent1"/>
+          </a:effectRef>
+          <a:fontRef idx="minor">
+            <a:schemeClr val="lt1"/>
+          </a:fontRef>
+        </p:style>
+        <p:txBody>
+          <a:bodyPr rtlCol="0" anchor="ctr"/>
+          <a:lstStyle/>
+          <a:p>
+            <a:pPr algn="ctr"/>
+            <a:r>
+              <a:rPr lang="en-GB" dirty="0">
+                <a:ln>
+                  <a:solidFill>
+                    <a:schemeClr val="tx1"/>
+                  </a:solidFill>
+                </a:ln>
+                <a:solidFill>
+                  <a:schemeClr val="tx1"/>
+                </a:solidFill>
+              </a:rPr>
+              <a:t>μ</a:t>
+            </a:r>
+          </a:p>
+        </p:txBody>
+      </p:sp>
+      <p:cxnSp>
+        <p:nvCxnSpPr>
+          <p:cNvPr id="17" name="Straight Arrow Connector 16">
+            <a:extLst>
+              <a:ext uri="{FF2B5EF4-FFF2-40B4-BE49-F238E27FC236}">
+                <a16:creationId xmlns:a16="http://schemas.microsoft.com/office/drawing/2014/main" id="{1CA6969B-0DDF-4BD5-9DC7-C0AF295ED3C1}"/>
+              </a:ext>
+            </a:extLst>
+          </p:cNvPr>
+          <p:cNvCxnSpPr>
+            <a:stCxn id="16" idx="3"/>
+          </p:cNvCxnSpPr>
+          <p:nvPr/>
+        </p:nvCxnSpPr>
+        <p:spPr>
+          <a:xfrm>
+            <a:off x="2217550" y="588579"/>
             <a:ext cx="1" cy="649065"/>
           </a:xfrm>
           <a:prstGeom prst="straightConnector1">

--- a/lv_readings/images/ctt.pptx
+++ b/lv_readings/images/ctt.pptx
@@ -10,6 +10,7 @@
     <p:sldId id="258" r:id="rId4"/>
     <p:sldId id="259" r:id="rId5"/>
     <p:sldId id="260" r:id="rId6"/>
+    <p:sldId id="261" r:id="rId7"/>
   </p:sldIdLst>
   <p:sldSz cx="12192000" cy="4319588"/>
   <p:notesSz cx="6858000" cy="9144000"/>
@@ -247,7 +248,7 @@
           <a:p>
             <a:fld id="{03831E2C-BFD0-4A74-B62A-BA7494EC057D}" type="datetimeFigureOut">
               <a:rPr lang="en-GB" smtClean="0"/>
-              <a:t>10/11/2025</a:t>
+              <a:t>13/11/2025</a:t>
             </a:fld>
             <a:endParaRPr lang="en-GB"/>
           </a:p>
@@ -417,7 +418,7 @@
           <a:p>
             <a:fld id="{03831E2C-BFD0-4A74-B62A-BA7494EC057D}" type="datetimeFigureOut">
               <a:rPr lang="en-GB" smtClean="0"/>
-              <a:t>10/11/2025</a:t>
+              <a:t>13/11/2025</a:t>
             </a:fld>
             <a:endParaRPr lang="en-GB"/>
           </a:p>
@@ -597,7 +598,7 @@
           <a:p>
             <a:fld id="{03831E2C-BFD0-4A74-B62A-BA7494EC057D}" type="datetimeFigureOut">
               <a:rPr lang="en-GB" smtClean="0"/>
-              <a:t>10/11/2025</a:t>
+              <a:t>13/11/2025</a:t>
             </a:fld>
             <a:endParaRPr lang="en-GB"/>
           </a:p>
@@ -767,7 +768,7 @@
           <a:p>
             <a:fld id="{03831E2C-BFD0-4A74-B62A-BA7494EC057D}" type="datetimeFigureOut">
               <a:rPr lang="en-GB" smtClean="0"/>
-              <a:t>10/11/2025</a:t>
+              <a:t>13/11/2025</a:t>
             </a:fld>
             <a:endParaRPr lang="en-GB"/>
           </a:p>
@@ -1013,7 +1014,7 @@
           <a:p>
             <a:fld id="{03831E2C-BFD0-4A74-B62A-BA7494EC057D}" type="datetimeFigureOut">
               <a:rPr lang="en-GB" smtClean="0"/>
-              <a:t>10/11/2025</a:t>
+              <a:t>13/11/2025</a:t>
             </a:fld>
             <a:endParaRPr lang="en-GB"/>
           </a:p>
@@ -1245,7 +1246,7 @@
           <a:p>
             <a:fld id="{03831E2C-BFD0-4A74-B62A-BA7494EC057D}" type="datetimeFigureOut">
               <a:rPr lang="en-GB" smtClean="0"/>
-              <a:t>10/11/2025</a:t>
+              <a:t>13/11/2025</a:t>
             </a:fld>
             <a:endParaRPr lang="en-GB"/>
           </a:p>
@@ -1612,7 +1613,7 @@
           <a:p>
             <a:fld id="{03831E2C-BFD0-4A74-B62A-BA7494EC057D}" type="datetimeFigureOut">
               <a:rPr lang="en-GB" smtClean="0"/>
-              <a:t>10/11/2025</a:t>
+              <a:t>13/11/2025</a:t>
             </a:fld>
             <a:endParaRPr lang="en-GB"/>
           </a:p>
@@ -1730,7 +1731,7 @@
           <a:p>
             <a:fld id="{03831E2C-BFD0-4A74-B62A-BA7494EC057D}" type="datetimeFigureOut">
               <a:rPr lang="en-GB" smtClean="0"/>
-              <a:t>10/11/2025</a:t>
+              <a:t>13/11/2025</a:t>
             </a:fld>
             <a:endParaRPr lang="en-GB"/>
           </a:p>
@@ -1825,7 +1826,7 @@
           <a:p>
             <a:fld id="{03831E2C-BFD0-4A74-B62A-BA7494EC057D}" type="datetimeFigureOut">
               <a:rPr lang="en-GB" smtClean="0"/>
-              <a:t>10/11/2025</a:t>
+              <a:t>13/11/2025</a:t>
             </a:fld>
             <a:endParaRPr lang="en-GB"/>
           </a:p>
@@ -2102,7 +2103,7 @@
           <a:p>
             <a:fld id="{03831E2C-BFD0-4A74-B62A-BA7494EC057D}" type="datetimeFigureOut">
               <a:rPr lang="en-GB" smtClean="0"/>
-              <a:t>10/11/2025</a:t>
+              <a:t>13/11/2025</a:t>
             </a:fld>
             <a:endParaRPr lang="en-GB"/>
           </a:p>
@@ -2359,7 +2360,7 @@
           <a:p>
             <a:fld id="{03831E2C-BFD0-4A74-B62A-BA7494EC057D}" type="datetimeFigureOut">
               <a:rPr lang="en-GB" smtClean="0"/>
-              <a:t>10/11/2025</a:t>
+              <a:t>13/11/2025</a:t>
             </a:fld>
             <a:endParaRPr lang="en-GB"/>
           </a:p>
@@ -2572,7 +2573,7 @@
           <a:p>
             <a:fld id="{03831E2C-BFD0-4A74-B62A-BA7494EC057D}" type="datetimeFigureOut">
               <a:rPr lang="en-GB" smtClean="0"/>
-              <a:t>10/11/2025</a:t>
+              <a:t>13/11/2025</a:t>
             </a:fld>
             <a:endParaRPr lang="en-GB"/>
           </a:p>
@@ -6998,6 +6999,2183 @@
 </p:sld>
 </file>
 
+<file path=ppt/slides/slide6.xml><?xml version="1.0" encoding="utf-8"?>
+<p:sld xmlns:a="http://schemas.openxmlformats.org/drawingml/2006/main" xmlns:r="http://schemas.openxmlformats.org/officeDocument/2006/relationships" xmlns:p="http://schemas.openxmlformats.org/presentationml/2006/main">
+  <p:cSld>
+    <p:spTree>
+      <p:nvGrpSpPr>
+        <p:cNvPr id="1" name=""/>
+        <p:cNvGrpSpPr/>
+        <p:nvPr/>
+      </p:nvGrpSpPr>
+      <p:grpSpPr>
+        <a:xfrm>
+          <a:off x="0" y="0"/>
+          <a:ext cx="0" cy="0"/>
+          <a:chOff x="0" y="0"/>
+          <a:chExt cx="0" cy="0"/>
+        </a:xfrm>
+      </p:grpSpPr>
+      <p:sp>
+        <p:nvSpPr>
+          <p:cNvPr id="4" name="Rectangle 3">
+            <a:extLst>
+              <a:ext uri="{FF2B5EF4-FFF2-40B4-BE49-F238E27FC236}">
+                <a16:creationId xmlns:a16="http://schemas.microsoft.com/office/drawing/2014/main" id="{13679C58-CC37-45D9-9595-F552B6CD8136}"/>
+              </a:ext>
+            </a:extLst>
+          </p:cNvPr>
+          <p:cNvSpPr/>
+          <p:nvPr/>
+        </p:nvSpPr>
+        <p:spPr>
+          <a:xfrm>
+            <a:off x="5150604" y="278977"/>
+            <a:ext cx="938632" cy="727055"/>
+          </a:xfrm>
+          <a:prstGeom prst="rect">
+            <a:avLst/>
+          </a:prstGeom>
+          <a:solidFill>
+            <a:schemeClr val="bg1"/>
+          </a:solidFill>
+          <a:ln w="57150">
+            <a:solidFill>
+              <a:schemeClr val="tx1"/>
+            </a:solidFill>
+          </a:ln>
+        </p:spPr>
+        <p:style>
+          <a:lnRef idx="2">
+            <a:schemeClr val="accent1">
+              <a:shade val="50000"/>
+            </a:schemeClr>
+          </a:lnRef>
+          <a:fillRef idx="1">
+            <a:schemeClr val="accent1"/>
+          </a:fillRef>
+          <a:effectRef idx="0">
+            <a:schemeClr val="accent1"/>
+          </a:effectRef>
+          <a:fontRef idx="minor">
+            <a:schemeClr val="lt1"/>
+          </a:fontRef>
+        </p:style>
+        <p:txBody>
+          <a:bodyPr rtlCol="0" anchor="ctr"/>
+          <a:lstStyle/>
+          <a:p>
+            <a:pPr algn="ctr"/>
+            <a:r>
+              <a:rPr lang="en-GB" sz="1200" dirty="0">
+                <a:solidFill>
+                  <a:schemeClr val="tx1"/>
+                </a:solidFill>
+              </a:rPr>
+              <a:t>SCORE 1</a:t>
+            </a:r>
+          </a:p>
+        </p:txBody>
+      </p:sp>
+      <p:sp>
+        <p:nvSpPr>
+          <p:cNvPr id="5" name="Oval 4">
+            <a:extLst>
+              <a:ext uri="{FF2B5EF4-FFF2-40B4-BE49-F238E27FC236}">
+                <a16:creationId xmlns:a16="http://schemas.microsoft.com/office/drawing/2014/main" id="{A8F843EA-24E0-45D1-A1F6-2BA1CFCA9010}"/>
+              </a:ext>
+            </a:extLst>
+          </p:cNvPr>
+          <p:cNvSpPr/>
+          <p:nvPr/>
+        </p:nvSpPr>
+        <p:spPr>
+          <a:xfrm>
+            <a:off x="1314773" y="1239864"/>
+            <a:ext cx="1805553" cy="1604075"/>
+          </a:xfrm>
+          <a:prstGeom prst="ellipse">
+            <a:avLst/>
+          </a:prstGeom>
+          <a:solidFill>
+            <a:schemeClr val="bg1"/>
+          </a:solidFill>
+          <a:ln w="57150">
+            <a:solidFill>
+              <a:schemeClr val="tx1"/>
+            </a:solidFill>
+          </a:ln>
+        </p:spPr>
+        <p:style>
+          <a:lnRef idx="2">
+            <a:schemeClr val="accent1">
+              <a:shade val="50000"/>
+            </a:schemeClr>
+          </a:lnRef>
+          <a:fillRef idx="1">
+            <a:schemeClr val="accent1"/>
+          </a:fillRef>
+          <a:effectRef idx="0">
+            <a:schemeClr val="accent1"/>
+          </a:effectRef>
+          <a:fontRef idx="minor">
+            <a:schemeClr val="lt1"/>
+          </a:fontRef>
+        </p:style>
+        <p:txBody>
+          <a:bodyPr rtlCol="0" anchor="ctr"/>
+          <a:lstStyle/>
+          <a:p>
+            <a:pPr algn="ctr"/>
+            <a:r>
+              <a:rPr lang="en-GB" sz="2400" dirty="0">
+                <a:solidFill>
+                  <a:schemeClr val="tx1"/>
+                </a:solidFill>
+              </a:rPr>
+              <a:t>TRUTH</a:t>
+            </a:r>
+          </a:p>
+        </p:txBody>
+      </p:sp>
+      <p:sp>
+        <p:nvSpPr>
+          <p:cNvPr id="6" name="Oval 5">
+            <a:extLst>
+              <a:ext uri="{FF2B5EF4-FFF2-40B4-BE49-F238E27FC236}">
+                <a16:creationId xmlns:a16="http://schemas.microsoft.com/office/drawing/2014/main" id="{C60FEDF8-6CFC-465D-82C0-B18172D83011}"/>
+              </a:ext>
+            </a:extLst>
+          </p:cNvPr>
+          <p:cNvSpPr/>
+          <p:nvPr/>
+        </p:nvSpPr>
+        <p:spPr>
+          <a:xfrm>
+            <a:off x="7475346" y="238010"/>
+            <a:ext cx="896317" cy="796299"/>
+          </a:xfrm>
+          <a:prstGeom prst="ellipse">
+            <a:avLst/>
+          </a:prstGeom>
+          <a:solidFill>
+            <a:schemeClr val="bg1"/>
+          </a:solidFill>
+          <a:ln w="57150">
+            <a:solidFill>
+              <a:schemeClr val="tx1"/>
+            </a:solidFill>
+          </a:ln>
+        </p:spPr>
+        <p:style>
+          <a:lnRef idx="2">
+            <a:schemeClr val="accent1">
+              <a:shade val="50000"/>
+            </a:schemeClr>
+          </a:lnRef>
+          <a:fillRef idx="1">
+            <a:schemeClr val="accent1"/>
+          </a:fillRef>
+          <a:effectRef idx="0">
+            <a:schemeClr val="accent1"/>
+          </a:effectRef>
+          <a:fontRef idx="minor">
+            <a:schemeClr val="lt1"/>
+          </a:fontRef>
+        </p:style>
+        <p:txBody>
+          <a:bodyPr rtlCol="0" anchor="ctr"/>
+          <a:lstStyle/>
+          <a:p>
+            <a:pPr algn="ctr"/>
+            <a:r>
+              <a:rPr lang="en-GB" sz="1200" dirty="0">
+                <a:solidFill>
+                  <a:schemeClr val="tx1"/>
+                </a:solidFill>
+              </a:rPr>
+              <a:t>ERROR</a:t>
+            </a:r>
+          </a:p>
+          <a:p>
+            <a:pPr algn="ctr"/>
+            <a:r>
+              <a:rPr lang="en-GB" sz="1200" dirty="0">
+                <a:solidFill>
+                  <a:schemeClr val="tx1"/>
+                </a:solidFill>
+              </a:rPr>
+              <a:t>1</a:t>
+            </a:r>
+          </a:p>
+        </p:txBody>
+      </p:sp>
+      <p:cxnSp>
+        <p:nvCxnSpPr>
+          <p:cNvPr id="8" name="Straight Arrow Connector 7">
+            <a:extLst>
+              <a:ext uri="{FF2B5EF4-FFF2-40B4-BE49-F238E27FC236}">
+                <a16:creationId xmlns:a16="http://schemas.microsoft.com/office/drawing/2014/main" id="{BF429E3C-7167-4C2A-B2DF-BACB9A4695C5}"/>
+              </a:ext>
+            </a:extLst>
+          </p:cNvPr>
+          <p:cNvCxnSpPr>
+            <a:cxnSpLocks/>
+            <a:stCxn id="5" idx="6"/>
+            <a:endCxn id="4" idx="1"/>
+          </p:cNvCxnSpPr>
+          <p:nvPr/>
+        </p:nvCxnSpPr>
+        <p:spPr>
+          <a:xfrm flipV="1">
+            <a:off x="3120326" y="642505"/>
+            <a:ext cx="2030278" cy="1399397"/>
+          </a:xfrm>
+          <a:prstGeom prst="straightConnector1">
+            <a:avLst/>
+          </a:prstGeom>
+          <a:ln w="57150">
+            <a:solidFill>
+              <a:schemeClr val="tx1"/>
+            </a:solidFill>
+            <a:tailEnd type="triangle"/>
+          </a:ln>
+        </p:spPr>
+        <p:style>
+          <a:lnRef idx="1">
+            <a:schemeClr val="accent1"/>
+          </a:lnRef>
+          <a:fillRef idx="0">
+            <a:schemeClr val="accent1"/>
+          </a:fillRef>
+          <a:effectRef idx="0">
+            <a:schemeClr val="accent1"/>
+          </a:effectRef>
+          <a:fontRef idx="minor">
+            <a:schemeClr val="tx1"/>
+          </a:fontRef>
+        </p:style>
+      </p:cxnSp>
+      <p:cxnSp>
+        <p:nvCxnSpPr>
+          <p:cNvPr id="10" name="Straight Arrow Connector 9">
+            <a:extLst>
+              <a:ext uri="{FF2B5EF4-FFF2-40B4-BE49-F238E27FC236}">
+                <a16:creationId xmlns:a16="http://schemas.microsoft.com/office/drawing/2014/main" id="{7E5C6824-9534-45F4-9FF2-47C3429B174A}"/>
+              </a:ext>
+            </a:extLst>
+          </p:cNvPr>
+          <p:cNvCxnSpPr>
+            <a:stCxn id="6" idx="2"/>
+            <a:endCxn id="4" idx="3"/>
+          </p:cNvCxnSpPr>
+          <p:nvPr/>
+        </p:nvCxnSpPr>
+        <p:spPr>
+          <a:xfrm flipH="1">
+            <a:off x="6089236" y="636160"/>
+            <a:ext cx="1386110" cy="6345"/>
+          </a:xfrm>
+          <a:prstGeom prst="straightConnector1">
+            <a:avLst/>
+          </a:prstGeom>
+          <a:ln w="57150">
+            <a:solidFill>
+              <a:schemeClr val="tx1"/>
+            </a:solidFill>
+            <a:tailEnd type="triangle"/>
+          </a:ln>
+        </p:spPr>
+        <p:style>
+          <a:lnRef idx="1">
+            <a:schemeClr val="accent1"/>
+          </a:lnRef>
+          <a:fillRef idx="0">
+            <a:schemeClr val="accent1"/>
+          </a:fillRef>
+          <a:effectRef idx="0">
+            <a:schemeClr val="accent1"/>
+          </a:effectRef>
+          <a:fontRef idx="minor">
+            <a:schemeClr val="tx1"/>
+          </a:fontRef>
+        </p:style>
+      </p:cxnSp>
+      <p:sp>
+        <p:nvSpPr>
+          <p:cNvPr id="11" name="TextBox 10">
+            <a:extLst>
+              <a:ext uri="{FF2B5EF4-FFF2-40B4-BE49-F238E27FC236}">
+                <a16:creationId xmlns:a16="http://schemas.microsoft.com/office/drawing/2014/main" id="{1456E4F1-DE66-4E9D-809D-41B4EE6071B1}"/>
+              </a:ext>
+            </a:extLst>
+          </p:cNvPr>
+          <p:cNvSpPr txBox="1"/>
+          <p:nvPr/>
+        </p:nvSpPr>
+        <p:spPr>
+          <a:xfrm>
+            <a:off x="3897823" y="1029667"/>
+            <a:ext cx="301686" cy="369332"/>
+          </a:xfrm>
+          <a:prstGeom prst="rect">
+            <a:avLst/>
+          </a:prstGeom>
+          <a:noFill/>
+          <a:ln w="57150">
+            <a:noFill/>
+          </a:ln>
+        </p:spPr>
+        <p:txBody>
+          <a:bodyPr wrap="none" rtlCol="0">
+            <a:spAutoFit/>
+          </a:bodyPr>
+          <a:lstStyle/>
+          <a:p>
+            <a:r>
+              <a:rPr lang="en-GB" dirty="0"/>
+              <a:t>1</a:t>
+            </a:r>
+          </a:p>
+        </p:txBody>
+      </p:sp>
+      <p:cxnSp>
+        <p:nvCxnSpPr>
+          <p:cNvPr id="13" name="Connector: Curved 12">
+            <a:extLst>
+              <a:ext uri="{FF2B5EF4-FFF2-40B4-BE49-F238E27FC236}">
+                <a16:creationId xmlns:a16="http://schemas.microsoft.com/office/drawing/2014/main" id="{C2E09663-D1F4-4EE0-BE9B-ABB78BF0BC0E}"/>
+              </a:ext>
+            </a:extLst>
+          </p:cNvPr>
+          <p:cNvCxnSpPr>
+            <a:cxnSpLocks/>
+            <a:stCxn id="5" idx="2"/>
+            <a:endCxn id="5" idx="3"/>
+          </p:cNvCxnSpPr>
+          <p:nvPr/>
+        </p:nvCxnSpPr>
+        <p:spPr>
+          <a:xfrm rot="10800000" flipH="1" flipV="1">
+            <a:off x="1314772" y="2041902"/>
+            <a:ext cx="264417" cy="567126"/>
+          </a:xfrm>
+          <a:prstGeom prst="curvedConnector4">
+            <a:avLst>
+              <a:gd name="adj1" fmla="val -250571"/>
+              <a:gd name="adj2" fmla="val 181730"/>
+            </a:avLst>
+          </a:prstGeom>
+          <a:ln w="38100">
+            <a:solidFill>
+              <a:schemeClr val="tx1"/>
+            </a:solidFill>
+            <a:headEnd type="triangle"/>
+            <a:tailEnd type="triangle"/>
+          </a:ln>
+        </p:spPr>
+        <p:style>
+          <a:lnRef idx="1">
+            <a:schemeClr val="accent1"/>
+          </a:lnRef>
+          <a:fillRef idx="0">
+            <a:schemeClr val="accent1"/>
+          </a:fillRef>
+          <a:effectRef idx="0">
+            <a:schemeClr val="accent1"/>
+          </a:effectRef>
+          <a:fontRef idx="minor">
+            <a:schemeClr val="tx1"/>
+          </a:fontRef>
+        </p:style>
+      </p:cxnSp>
+      <p:cxnSp>
+        <p:nvCxnSpPr>
+          <p:cNvPr id="15" name="Connector: Curved 14">
+            <a:extLst>
+              <a:ext uri="{FF2B5EF4-FFF2-40B4-BE49-F238E27FC236}">
+                <a16:creationId xmlns:a16="http://schemas.microsoft.com/office/drawing/2014/main" id="{FBD55DE1-401C-4871-9944-22845DD34446}"/>
+              </a:ext>
+            </a:extLst>
+          </p:cNvPr>
+          <p:cNvCxnSpPr>
+            <a:cxnSpLocks/>
+            <a:stCxn id="6" idx="6"/>
+            <a:endCxn id="6" idx="5"/>
+          </p:cNvCxnSpPr>
+          <p:nvPr/>
+        </p:nvCxnSpPr>
+        <p:spPr>
+          <a:xfrm flipH="1">
+            <a:off x="8240400" y="636160"/>
+            <a:ext cx="131263" cy="281534"/>
+          </a:xfrm>
+          <a:prstGeom prst="curvedConnector4">
+            <a:avLst>
+              <a:gd name="adj1" fmla="val -174154"/>
+              <a:gd name="adj2" fmla="val 142797"/>
+            </a:avLst>
+          </a:prstGeom>
+          <a:ln w="38100">
+            <a:solidFill>
+              <a:schemeClr val="tx1"/>
+            </a:solidFill>
+            <a:headEnd type="triangle"/>
+            <a:tailEnd type="triangle"/>
+          </a:ln>
+        </p:spPr>
+        <p:style>
+          <a:lnRef idx="1">
+            <a:schemeClr val="accent1"/>
+          </a:lnRef>
+          <a:fillRef idx="0">
+            <a:schemeClr val="accent1"/>
+          </a:fillRef>
+          <a:effectRef idx="0">
+            <a:schemeClr val="accent1"/>
+          </a:effectRef>
+          <a:fontRef idx="minor">
+            <a:schemeClr val="tx1"/>
+          </a:fontRef>
+        </p:style>
+      </p:cxnSp>
+      <p:sp>
+        <p:nvSpPr>
+          <p:cNvPr id="14" name="Rectangle 13">
+            <a:extLst>
+              <a:ext uri="{FF2B5EF4-FFF2-40B4-BE49-F238E27FC236}">
+                <a16:creationId xmlns:a16="http://schemas.microsoft.com/office/drawing/2014/main" id="{599956DB-86B7-4C47-A148-3B43F22866A1}"/>
+              </a:ext>
+            </a:extLst>
+          </p:cNvPr>
+          <p:cNvSpPr/>
+          <p:nvPr/>
+        </p:nvSpPr>
+        <p:spPr>
+          <a:xfrm>
+            <a:off x="5150604" y="1274877"/>
+            <a:ext cx="938632" cy="727055"/>
+          </a:xfrm>
+          <a:prstGeom prst="rect">
+            <a:avLst/>
+          </a:prstGeom>
+          <a:solidFill>
+            <a:schemeClr val="bg1"/>
+          </a:solidFill>
+          <a:ln w="57150">
+            <a:solidFill>
+              <a:schemeClr val="tx1"/>
+            </a:solidFill>
+          </a:ln>
+        </p:spPr>
+        <p:style>
+          <a:lnRef idx="2">
+            <a:schemeClr val="accent1">
+              <a:shade val="50000"/>
+            </a:schemeClr>
+          </a:lnRef>
+          <a:fillRef idx="1">
+            <a:schemeClr val="accent1"/>
+          </a:fillRef>
+          <a:effectRef idx="0">
+            <a:schemeClr val="accent1"/>
+          </a:effectRef>
+          <a:fontRef idx="minor">
+            <a:schemeClr val="lt1"/>
+          </a:fontRef>
+        </p:style>
+        <p:txBody>
+          <a:bodyPr rtlCol="0" anchor="ctr"/>
+          <a:lstStyle/>
+          <a:p>
+            <a:pPr algn="ctr"/>
+            <a:r>
+              <a:rPr lang="en-GB" sz="1200" dirty="0">
+                <a:solidFill>
+                  <a:schemeClr val="tx1"/>
+                </a:solidFill>
+              </a:rPr>
+              <a:t>SCORE 2</a:t>
+            </a:r>
+          </a:p>
+        </p:txBody>
+      </p:sp>
+      <p:sp>
+        <p:nvSpPr>
+          <p:cNvPr id="16" name="Oval 15">
+            <a:extLst>
+              <a:ext uri="{FF2B5EF4-FFF2-40B4-BE49-F238E27FC236}">
+                <a16:creationId xmlns:a16="http://schemas.microsoft.com/office/drawing/2014/main" id="{EDE0B9F1-A3D1-42C9-8AD6-7EF820230F07}"/>
+              </a:ext>
+            </a:extLst>
+          </p:cNvPr>
+          <p:cNvSpPr/>
+          <p:nvPr/>
+        </p:nvSpPr>
+        <p:spPr>
+          <a:xfrm>
+            <a:off x="7475346" y="1233910"/>
+            <a:ext cx="896317" cy="796299"/>
+          </a:xfrm>
+          <a:prstGeom prst="ellipse">
+            <a:avLst/>
+          </a:prstGeom>
+          <a:solidFill>
+            <a:schemeClr val="bg1"/>
+          </a:solidFill>
+          <a:ln w="57150">
+            <a:solidFill>
+              <a:schemeClr val="tx1"/>
+            </a:solidFill>
+          </a:ln>
+        </p:spPr>
+        <p:style>
+          <a:lnRef idx="2">
+            <a:schemeClr val="accent1">
+              <a:shade val="50000"/>
+            </a:schemeClr>
+          </a:lnRef>
+          <a:fillRef idx="1">
+            <a:schemeClr val="accent1"/>
+          </a:fillRef>
+          <a:effectRef idx="0">
+            <a:schemeClr val="accent1"/>
+          </a:effectRef>
+          <a:fontRef idx="minor">
+            <a:schemeClr val="lt1"/>
+          </a:fontRef>
+        </p:style>
+        <p:txBody>
+          <a:bodyPr rtlCol="0" anchor="ctr"/>
+          <a:lstStyle/>
+          <a:p>
+            <a:pPr algn="ctr"/>
+            <a:r>
+              <a:rPr lang="en-GB" sz="1200" dirty="0">
+                <a:solidFill>
+                  <a:schemeClr val="tx1"/>
+                </a:solidFill>
+              </a:rPr>
+              <a:t>ERROR 2</a:t>
+            </a:r>
+          </a:p>
+        </p:txBody>
+      </p:sp>
+      <p:cxnSp>
+        <p:nvCxnSpPr>
+          <p:cNvPr id="17" name="Straight Arrow Connector 16">
+            <a:extLst>
+              <a:ext uri="{FF2B5EF4-FFF2-40B4-BE49-F238E27FC236}">
+                <a16:creationId xmlns:a16="http://schemas.microsoft.com/office/drawing/2014/main" id="{98573A8B-D30A-4AAA-A2DF-FE7A0EF9C6ED}"/>
+              </a:ext>
+            </a:extLst>
+          </p:cNvPr>
+          <p:cNvCxnSpPr>
+            <a:stCxn id="16" idx="2"/>
+            <a:endCxn id="14" idx="3"/>
+          </p:cNvCxnSpPr>
+          <p:nvPr/>
+        </p:nvCxnSpPr>
+        <p:spPr>
+          <a:xfrm flipH="1">
+            <a:off x="6089236" y="1632060"/>
+            <a:ext cx="1386110" cy="6345"/>
+          </a:xfrm>
+          <a:prstGeom prst="straightConnector1">
+            <a:avLst/>
+          </a:prstGeom>
+          <a:ln w="57150">
+            <a:solidFill>
+              <a:schemeClr val="tx1"/>
+            </a:solidFill>
+            <a:tailEnd type="triangle"/>
+          </a:ln>
+        </p:spPr>
+        <p:style>
+          <a:lnRef idx="1">
+            <a:schemeClr val="accent1"/>
+          </a:lnRef>
+          <a:fillRef idx="0">
+            <a:schemeClr val="accent1"/>
+          </a:fillRef>
+          <a:effectRef idx="0">
+            <a:schemeClr val="accent1"/>
+          </a:effectRef>
+          <a:fontRef idx="minor">
+            <a:schemeClr val="tx1"/>
+          </a:fontRef>
+        </p:style>
+      </p:cxnSp>
+      <p:sp>
+        <p:nvSpPr>
+          <p:cNvPr id="18" name="TextBox 17">
+            <a:extLst>
+              <a:ext uri="{FF2B5EF4-FFF2-40B4-BE49-F238E27FC236}">
+                <a16:creationId xmlns:a16="http://schemas.microsoft.com/office/drawing/2014/main" id="{4A926A9B-BB56-4641-BBC0-A1F0E5BE4B00}"/>
+              </a:ext>
+            </a:extLst>
+          </p:cNvPr>
+          <p:cNvSpPr txBox="1"/>
+          <p:nvPr/>
+        </p:nvSpPr>
+        <p:spPr>
+          <a:xfrm>
+            <a:off x="7910860" y="2563208"/>
+            <a:ext cx="149764" cy="276999"/>
+          </a:xfrm>
+          <a:prstGeom prst="rect">
+            <a:avLst/>
+          </a:prstGeom>
+          <a:solidFill>
+            <a:schemeClr val="bg1"/>
+          </a:solidFill>
+          <a:ln w="57150">
+            <a:noFill/>
+          </a:ln>
+        </p:spPr>
+        <p:txBody>
+          <a:bodyPr wrap="square" rtlCol="0">
+            <a:spAutoFit/>
+          </a:bodyPr>
+          <a:lstStyle/>
+          <a:p>
+            <a:r>
+              <a:rPr lang="en-GB" sz="1200" dirty="0"/>
+              <a:t>1</a:t>
+            </a:r>
+          </a:p>
+        </p:txBody>
+      </p:sp>
+      <p:cxnSp>
+        <p:nvCxnSpPr>
+          <p:cNvPr id="19" name="Connector: Curved 18">
+            <a:extLst>
+              <a:ext uri="{FF2B5EF4-FFF2-40B4-BE49-F238E27FC236}">
+                <a16:creationId xmlns:a16="http://schemas.microsoft.com/office/drawing/2014/main" id="{AA9EC6D0-7B32-49BE-95A4-E8BAB471F9F5}"/>
+              </a:ext>
+            </a:extLst>
+          </p:cNvPr>
+          <p:cNvCxnSpPr>
+            <a:cxnSpLocks/>
+            <a:stCxn id="16" idx="6"/>
+            <a:endCxn id="16" idx="5"/>
+          </p:cNvCxnSpPr>
+          <p:nvPr/>
+        </p:nvCxnSpPr>
+        <p:spPr>
+          <a:xfrm flipH="1">
+            <a:off x="8240400" y="1632060"/>
+            <a:ext cx="131263" cy="281534"/>
+          </a:xfrm>
+          <a:prstGeom prst="curvedConnector4">
+            <a:avLst>
+              <a:gd name="adj1" fmla="val -174154"/>
+              <a:gd name="adj2" fmla="val 145550"/>
+            </a:avLst>
+          </a:prstGeom>
+          <a:ln w="38100">
+            <a:solidFill>
+              <a:schemeClr val="tx1"/>
+            </a:solidFill>
+            <a:headEnd type="triangle"/>
+            <a:tailEnd type="triangle"/>
+          </a:ln>
+        </p:spPr>
+        <p:style>
+          <a:lnRef idx="1">
+            <a:schemeClr val="accent1"/>
+          </a:lnRef>
+          <a:fillRef idx="0">
+            <a:schemeClr val="accent1"/>
+          </a:fillRef>
+          <a:effectRef idx="0">
+            <a:schemeClr val="accent1"/>
+          </a:effectRef>
+          <a:fontRef idx="minor">
+            <a:schemeClr val="tx1"/>
+          </a:fontRef>
+        </p:style>
+      </p:cxnSp>
+      <p:cxnSp>
+        <p:nvCxnSpPr>
+          <p:cNvPr id="20" name="Straight Arrow Connector 19">
+            <a:extLst>
+              <a:ext uri="{FF2B5EF4-FFF2-40B4-BE49-F238E27FC236}">
+                <a16:creationId xmlns:a16="http://schemas.microsoft.com/office/drawing/2014/main" id="{6B630B6D-E424-4C33-8586-4377C6DF0E25}"/>
+              </a:ext>
+            </a:extLst>
+          </p:cNvPr>
+          <p:cNvCxnSpPr>
+            <a:cxnSpLocks/>
+            <a:stCxn id="5" idx="6"/>
+            <a:endCxn id="14" idx="1"/>
+          </p:cNvCxnSpPr>
+          <p:nvPr/>
+        </p:nvCxnSpPr>
+        <p:spPr>
+          <a:xfrm flipV="1">
+            <a:off x="3120326" y="1638405"/>
+            <a:ext cx="2030278" cy="403497"/>
+          </a:xfrm>
+          <a:prstGeom prst="straightConnector1">
+            <a:avLst/>
+          </a:prstGeom>
+          <a:ln w="57150">
+            <a:solidFill>
+              <a:schemeClr val="tx1"/>
+            </a:solidFill>
+            <a:tailEnd type="triangle"/>
+          </a:ln>
+        </p:spPr>
+        <p:style>
+          <a:lnRef idx="1">
+            <a:schemeClr val="accent1"/>
+          </a:lnRef>
+          <a:fillRef idx="0">
+            <a:schemeClr val="accent1"/>
+          </a:fillRef>
+          <a:effectRef idx="0">
+            <a:schemeClr val="accent1"/>
+          </a:effectRef>
+          <a:fontRef idx="minor">
+            <a:schemeClr val="tx1"/>
+          </a:fontRef>
+        </p:style>
+      </p:cxnSp>
+      <p:sp>
+        <p:nvSpPr>
+          <p:cNvPr id="21" name="TextBox 20">
+            <a:extLst>
+              <a:ext uri="{FF2B5EF4-FFF2-40B4-BE49-F238E27FC236}">
+                <a16:creationId xmlns:a16="http://schemas.microsoft.com/office/drawing/2014/main" id="{5223EC97-B026-471A-8F49-E8023EABF955}"/>
+              </a:ext>
+            </a:extLst>
+          </p:cNvPr>
+          <p:cNvSpPr txBox="1"/>
+          <p:nvPr/>
+        </p:nvSpPr>
+        <p:spPr>
+          <a:xfrm>
+            <a:off x="3912869" y="1549568"/>
+            <a:ext cx="301686" cy="369332"/>
+          </a:xfrm>
+          <a:prstGeom prst="rect">
+            <a:avLst/>
+          </a:prstGeom>
+          <a:noFill/>
+          <a:ln w="57150">
+            <a:noFill/>
+          </a:ln>
+        </p:spPr>
+        <p:txBody>
+          <a:bodyPr wrap="none" rtlCol="0">
+            <a:spAutoFit/>
+          </a:bodyPr>
+          <a:lstStyle/>
+          <a:p>
+            <a:r>
+              <a:rPr lang="en-GB" dirty="0"/>
+              <a:t>1</a:t>
+            </a:r>
+          </a:p>
+        </p:txBody>
+      </p:sp>
+      <mc:AlternateContent xmlns:mc="http://schemas.openxmlformats.org/markup-compatibility/2006" xmlns:a14="http://schemas.microsoft.com/office/drawing/2010/main">
+        <mc:Choice Requires="a14">
+          <p:sp>
+            <p:nvSpPr>
+              <p:cNvPr id="22" name="TextBox 21">
+                <a:extLst>
+                  <a:ext uri="{FF2B5EF4-FFF2-40B4-BE49-F238E27FC236}">
+                    <a16:creationId xmlns:a16="http://schemas.microsoft.com/office/drawing/2014/main" id="{B8D8693C-597D-4A1C-9E6C-5847FB62B2FE}"/>
+                  </a:ext>
+                </a:extLst>
+              </p:cNvPr>
+              <p:cNvSpPr txBox="1"/>
+              <p:nvPr/>
+            </p:nvSpPr>
+            <p:spPr>
+              <a:xfrm>
+                <a:off x="302217" y="2655129"/>
+                <a:ext cx="493084" cy="373179"/>
+              </a:xfrm>
+              <a:prstGeom prst="rect">
+                <a:avLst/>
+              </a:prstGeom>
+              <a:noFill/>
+            </p:spPr>
+            <p:txBody>
+              <a:bodyPr wrap="none" rtlCol="0">
+                <a:spAutoFit/>
+              </a:bodyPr>
+              <a:lstStyle/>
+              <a:p>
+                <a:pPr/>
+                <a14:m>
+                  <m:oMathPara xmlns:m="http://schemas.openxmlformats.org/officeDocument/2006/math">
+                    <m:oMathParaPr>
+                      <m:jc m:val="centerGroup"/>
+                    </m:oMathParaPr>
+                    <m:oMath xmlns:m="http://schemas.openxmlformats.org/officeDocument/2006/math">
+                      <m:sSubSup>
+                        <m:sSubSupPr>
+                          <m:ctrlPr>
+                            <a:rPr lang="en-GB" i="1" smtClean="0">
+                              <a:latin typeface="Cambria Math" panose="02040503050406030204" pitchFamily="18" charset="0"/>
+                            </a:rPr>
+                          </m:ctrlPr>
+                        </m:sSubSupPr>
+                        <m:e>
+                          <m:r>
+                            <a:rPr lang="en-GB" i="1" smtClean="0">
+                              <a:latin typeface="Cambria Math" panose="02040503050406030204" pitchFamily="18" charset="0"/>
+                              <a:ea typeface="Cambria Math" panose="02040503050406030204" pitchFamily="18" charset="0"/>
+                            </a:rPr>
+                            <m:t>𝜎</m:t>
+                          </m:r>
+                        </m:e>
+                        <m:sub>
+                          <m:r>
+                            <a:rPr lang="en-GB" b="0" i="1" smtClean="0">
+                              <a:latin typeface="Cambria Math" panose="02040503050406030204" pitchFamily="18" charset="0"/>
+                            </a:rPr>
+                            <m:t>𝑇</m:t>
+                          </m:r>
+                        </m:sub>
+                        <m:sup>
+                          <m:r>
+                            <a:rPr lang="en-GB" b="0" i="1" smtClean="0">
+                              <a:latin typeface="Cambria Math" panose="02040503050406030204" pitchFamily="18" charset="0"/>
+                            </a:rPr>
+                            <m:t>2</m:t>
+                          </m:r>
+                        </m:sup>
+                      </m:sSubSup>
+                    </m:oMath>
+                  </m:oMathPara>
+                </a14:m>
+                <a:endParaRPr lang="en-GB" dirty="0"/>
+              </a:p>
+            </p:txBody>
+          </p:sp>
+        </mc:Choice>
+        <mc:Fallback xmlns="">
+          <p:sp>
+            <p:nvSpPr>
+              <p:cNvPr id="22" name="TextBox 21">
+                <a:extLst>
+                  <a:ext uri="{FF2B5EF4-FFF2-40B4-BE49-F238E27FC236}">
+                    <a16:creationId xmlns:a16="http://schemas.microsoft.com/office/drawing/2014/main" id="{B8D8693C-597D-4A1C-9E6C-5847FB62B2FE}"/>
+                  </a:ext>
+                </a:extLst>
+              </p:cNvPr>
+              <p:cNvSpPr txBox="1">
+                <a:spLocks noRot="1" noChangeAspect="1" noMove="1" noResize="1" noEditPoints="1" noAdjustHandles="1" noChangeArrowheads="1" noChangeShapeType="1" noTextEdit="1"/>
+              </p:cNvSpPr>
+              <p:nvPr/>
+            </p:nvSpPr>
+            <p:spPr>
+              <a:xfrm>
+                <a:off x="302217" y="2655129"/>
+                <a:ext cx="493084" cy="373179"/>
+              </a:xfrm>
+              <a:prstGeom prst="rect">
+                <a:avLst/>
+              </a:prstGeom>
+              <a:blipFill>
+                <a:blip r:embed="rId2"/>
+                <a:stretch>
+                  <a:fillRect b="-1639"/>
+                </a:stretch>
+              </a:blipFill>
+            </p:spPr>
+            <p:txBody>
+              <a:bodyPr/>
+              <a:lstStyle/>
+              <a:p>
+                <a:r>
+                  <a:rPr lang="en-GB">
+                    <a:noFill/>
+                  </a:rPr>
+                  <a:t> </a:t>
+                </a:r>
+              </a:p>
+            </p:txBody>
+          </p:sp>
+        </mc:Fallback>
+      </mc:AlternateContent>
+      <mc:AlternateContent xmlns:mc="http://schemas.openxmlformats.org/markup-compatibility/2006" xmlns:a14="http://schemas.microsoft.com/office/drawing/2010/main">
+        <mc:Choice Requires="a14">
+          <p:sp>
+            <p:nvSpPr>
+              <p:cNvPr id="23" name="TextBox 22">
+                <a:extLst>
+                  <a:ext uri="{FF2B5EF4-FFF2-40B4-BE49-F238E27FC236}">
+                    <a16:creationId xmlns:a16="http://schemas.microsoft.com/office/drawing/2014/main" id="{CBC630C7-81E8-433B-AC7A-516D34FF9253}"/>
+                  </a:ext>
+                </a:extLst>
+              </p:cNvPr>
+              <p:cNvSpPr txBox="1"/>
+              <p:nvPr/>
+            </p:nvSpPr>
+            <p:spPr>
+              <a:xfrm>
+                <a:off x="8485800" y="799728"/>
+                <a:ext cx="244778" cy="373179"/>
+              </a:xfrm>
+              <a:prstGeom prst="rect">
+                <a:avLst/>
+              </a:prstGeom>
+              <a:noFill/>
+            </p:spPr>
+            <p:txBody>
+              <a:bodyPr wrap="square" rtlCol="0">
+                <a:spAutoFit/>
+              </a:bodyPr>
+              <a:lstStyle/>
+              <a:p>
+                <a:pPr/>
+                <a14:m>
+                  <m:oMathPara xmlns:m="http://schemas.openxmlformats.org/officeDocument/2006/math">
+                    <m:oMathParaPr>
+                      <m:jc m:val="centerGroup"/>
+                    </m:oMathParaPr>
+                    <m:oMath xmlns:m="http://schemas.openxmlformats.org/officeDocument/2006/math">
+                      <m:sSubSup>
+                        <m:sSubSupPr>
+                          <m:ctrlPr>
+                            <a:rPr lang="en-GB" i="1" smtClean="0">
+                              <a:latin typeface="Cambria Math" panose="02040503050406030204" pitchFamily="18" charset="0"/>
+                            </a:rPr>
+                          </m:ctrlPr>
+                        </m:sSubSupPr>
+                        <m:e>
+                          <m:r>
+                            <a:rPr lang="en-GB" i="1" smtClean="0">
+                              <a:latin typeface="Cambria Math" panose="02040503050406030204" pitchFamily="18" charset="0"/>
+                              <a:ea typeface="Cambria Math" panose="02040503050406030204" pitchFamily="18" charset="0"/>
+                            </a:rPr>
+                            <m:t>𝜎</m:t>
+                          </m:r>
+                        </m:e>
+                        <m:sub>
+                          <m:r>
+                            <a:rPr lang="en-GB" b="0" i="1" smtClean="0">
+                              <a:latin typeface="Cambria Math" panose="02040503050406030204" pitchFamily="18" charset="0"/>
+                            </a:rPr>
+                            <m:t>𝐸</m:t>
+                          </m:r>
+                        </m:sub>
+                        <m:sup>
+                          <m:r>
+                            <a:rPr lang="en-GB" b="0" i="1" smtClean="0">
+                              <a:latin typeface="Cambria Math" panose="02040503050406030204" pitchFamily="18" charset="0"/>
+                            </a:rPr>
+                            <m:t>2</m:t>
+                          </m:r>
+                        </m:sup>
+                      </m:sSubSup>
+                    </m:oMath>
+                  </m:oMathPara>
+                </a14:m>
+                <a:endParaRPr lang="en-GB" dirty="0"/>
+              </a:p>
+            </p:txBody>
+          </p:sp>
+        </mc:Choice>
+        <mc:Fallback xmlns="">
+          <p:sp>
+            <p:nvSpPr>
+              <p:cNvPr id="23" name="TextBox 22">
+                <a:extLst>
+                  <a:ext uri="{FF2B5EF4-FFF2-40B4-BE49-F238E27FC236}">
+                    <a16:creationId xmlns:a16="http://schemas.microsoft.com/office/drawing/2014/main" id="{CBC630C7-81E8-433B-AC7A-516D34FF9253}"/>
+                  </a:ext>
+                </a:extLst>
+              </p:cNvPr>
+              <p:cNvSpPr txBox="1">
+                <a:spLocks noRot="1" noChangeAspect="1" noMove="1" noResize="1" noEditPoints="1" noAdjustHandles="1" noChangeArrowheads="1" noChangeShapeType="1" noTextEdit="1"/>
+              </p:cNvSpPr>
+              <p:nvPr/>
+            </p:nvSpPr>
+            <p:spPr>
+              <a:xfrm>
+                <a:off x="8485800" y="799728"/>
+                <a:ext cx="244778" cy="373179"/>
+              </a:xfrm>
+              <a:prstGeom prst="rect">
+                <a:avLst/>
+              </a:prstGeom>
+              <a:blipFill>
+                <a:blip r:embed="rId3"/>
+                <a:stretch>
+                  <a:fillRect r="-62500" b="-1639"/>
+                </a:stretch>
+              </a:blipFill>
+            </p:spPr>
+            <p:txBody>
+              <a:bodyPr/>
+              <a:lstStyle/>
+              <a:p>
+                <a:r>
+                  <a:rPr lang="en-GB">
+                    <a:noFill/>
+                  </a:rPr>
+                  <a:t> </a:t>
+                </a:r>
+              </a:p>
+            </p:txBody>
+          </p:sp>
+        </mc:Fallback>
+      </mc:AlternateContent>
+      <mc:AlternateContent xmlns:mc="http://schemas.openxmlformats.org/markup-compatibility/2006" xmlns:a14="http://schemas.microsoft.com/office/drawing/2010/main">
+        <mc:Choice Requires="a14">
+          <p:sp>
+            <p:nvSpPr>
+              <p:cNvPr id="24" name="TextBox 23">
+                <a:extLst>
+                  <a:ext uri="{FF2B5EF4-FFF2-40B4-BE49-F238E27FC236}">
+                    <a16:creationId xmlns:a16="http://schemas.microsoft.com/office/drawing/2014/main" id="{C7D4C02A-CDA2-4E12-ADC0-2D3D281003F7}"/>
+                  </a:ext>
+                </a:extLst>
+              </p:cNvPr>
+              <p:cNvSpPr txBox="1"/>
+              <p:nvPr/>
+            </p:nvSpPr>
+            <p:spPr>
+              <a:xfrm>
+                <a:off x="8551438" y="2840207"/>
+                <a:ext cx="244778" cy="373179"/>
+              </a:xfrm>
+              <a:prstGeom prst="rect">
+                <a:avLst/>
+              </a:prstGeom>
+              <a:noFill/>
+            </p:spPr>
+            <p:txBody>
+              <a:bodyPr wrap="square" rtlCol="0">
+                <a:spAutoFit/>
+              </a:bodyPr>
+              <a:lstStyle/>
+              <a:p>
+                <a:pPr/>
+                <a14:m>
+                  <m:oMathPara xmlns:m="http://schemas.openxmlformats.org/officeDocument/2006/math">
+                    <m:oMathParaPr>
+                      <m:jc m:val="centerGroup"/>
+                    </m:oMathParaPr>
+                    <m:oMath xmlns:m="http://schemas.openxmlformats.org/officeDocument/2006/math">
+                      <m:sSubSup>
+                        <m:sSubSupPr>
+                          <m:ctrlPr>
+                            <a:rPr lang="en-GB" i="1" smtClean="0">
+                              <a:latin typeface="Cambria Math" panose="02040503050406030204" pitchFamily="18" charset="0"/>
+                            </a:rPr>
+                          </m:ctrlPr>
+                        </m:sSubSupPr>
+                        <m:e>
+                          <m:r>
+                            <a:rPr lang="en-GB" i="1" smtClean="0">
+                              <a:latin typeface="Cambria Math" panose="02040503050406030204" pitchFamily="18" charset="0"/>
+                              <a:ea typeface="Cambria Math" panose="02040503050406030204" pitchFamily="18" charset="0"/>
+                            </a:rPr>
+                            <m:t>𝜎</m:t>
+                          </m:r>
+                        </m:e>
+                        <m:sub>
+                          <m:r>
+                            <a:rPr lang="en-GB" b="0" i="1" smtClean="0">
+                              <a:latin typeface="Cambria Math" panose="02040503050406030204" pitchFamily="18" charset="0"/>
+                            </a:rPr>
+                            <m:t>𝐸</m:t>
+                          </m:r>
+                        </m:sub>
+                        <m:sup>
+                          <m:r>
+                            <a:rPr lang="en-GB" b="0" i="1" smtClean="0">
+                              <a:latin typeface="Cambria Math" panose="02040503050406030204" pitchFamily="18" charset="0"/>
+                            </a:rPr>
+                            <m:t>2</m:t>
+                          </m:r>
+                        </m:sup>
+                      </m:sSubSup>
+                    </m:oMath>
+                  </m:oMathPara>
+                </a14:m>
+                <a:endParaRPr lang="en-GB" dirty="0"/>
+              </a:p>
+            </p:txBody>
+          </p:sp>
+        </mc:Choice>
+        <mc:Fallback xmlns="">
+          <p:sp>
+            <p:nvSpPr>
+              <p:cNvPr id="24" name="TextBox 23">
+                <a:extLst>
+                  <a:ext uri="{FF2B5EF4-FFF2-40B4-BE49-F238E27FC236}">
+                    <a16:creationId xmlns:a16="http://schemas.microsoft.com/office/drawing/2014/main" id="{C7D4C02A-CDA2-4E12-ADC0-2D3D281003F7}"/>
+                  </a:ext>
+                </a:extLst>
+              </p:cNvPr>
+              <p:cNvSpPr txBox="1">
+                <a:spLocks noRot="1" noChangeAspect="1" noMove="1" noResize="1" noEditPoints="1" noAdjustHandles="1" noChangeArrowheads="1" noChangeShapeType="1" noTextEdit="1"/>
+              </p:cNvSpPr>
+              <p:nvPr/>
+            </p:nvSpPr>
+            <p:spPr>
+              <a:xfrm>
+                <a:off x="8551438" y="2840207"/>
+                <a:ext cx="244778" cy="373179"/>
+              </a:xfrm>
+              <a:prstGeom prst="rect">
+                <a:avLst/>
+              </a:prstGeom>
+              <a:blipFill>
+                <a:blip r:embed="rId4"/>
+                <a:stretch>
+                  <a:fillRect r="-60000" b="-1639"/>
+                </a:stretch>
+              </a:blipFill>
+            </p:spPr>
+            <p:txBody>
+              <a:bodyPr/>
+              <a:lstStyle/>
+              <a:p>
+                <a:r>
+                  <a:rPr lang="en-GB">
+                    <a:noFill/>
+                  </a:rPr>
+                  <a:t> </a:t>
+                </a:r>
+              </a:p>
+            </p:txBody>
+          </p:sp>
+        </mc:Fallback>
+      </mc:AlternateContent>
+      <p:sp>
+        <p:nvSpPr>
+          <p:cNvPr id="25" name="Rectangle 24">
+            <a:extLst>
+              <a:ext uri="{FF2B5EF4-FFF2-40B4-BE49-F238E27FC236}">
+                <a16:creationId xmlns:a16="http://schemas.microsoft.com/office/drawing/2014/main" id="{BC1D1CEA-1258-4357-BFD5-A39CCB486489}"/>
+              </a:ext>
+            </a:extLst>
+          </p:cNvPr>
+          <p:cNvSpPr/>
+          <p:nvPr/>
+        </p:nvSpPr>
+        <p:spPr>
+          <a:xfrm>
+            <a:off x="5150604" y="2378880"/>
+            <a:ext cx="938632" cy="727055"/>
+          </a:xfrm>
+          <a:prstGeom prst="rect">
+            <a:avLst/>
+          </a:prstGeom>
+          <a:solidFill>
+            <a:schemeClr val="bg1"/>
+          </a:solidFill>
+          <a:ln w="57150">
+            <a:solidFill>
+              <a:schemeClr val="tx1"/>
+            </a:solidFill>
+          </a:ln>
+        </p:spPr>
+        <p:style>
+          <a:lnRef idx="2">
+            <a:schemeClr val="accent1">
+              <a:shade val="50000"/>
+            </a:schemeClr>
+          </a:lnRef>
+          <a:fillRef idx="1">
+            <a:schemeClr val="accent1"/>
+          </a:fillRef>
+          <a:effectRef idx="0">
+            <a:schemeClr val="accent1"/>
+          </a:effectRef>
+          <a:fontRef idx="minor">
+            <a:schemeClr val="lt1"/>
+          </a:fontRef>
+        </p:style>
+        <p:txBody>
+          <a:bodyPr rtlCol="0" anchor="ctr"/>
+          <a:lstStyle/>
+          <a:p>
+            <a:pPr algn="ctr"/>
+            <a:r>
+              <a:rPr lang="en-GB" sz="1200" dirty="0">
+                <a:solidFill>
+                  <a:schemeClr val="tx1"/>
+                </a:solidFill>
+              </a:rPr>
+              <a:t>SCORE 3</a:t>
+            </a:r>
+          </a:p>
+        </p:txBody>
+      </p:sp>
+      <p:sp>
+        <p:nvSpPr>
+          <p:cNvPr id="26" name="Oval 25">
+            <a:extLst>
+              <a:ext uri="{FF2B5EF4-FFF2-40B4-BE49-F238E27FC236}">
+                <a16:creationId xmlns:a16="http://schemas.microsoft.com/office/drawing/2014/main" id="{CEBBEDA4-5051-4011-89CD-4B8143B42DD5}"/>
+              </a:ext>
+            </a:extLst>
+          </p:cNvPr>
+          <p:cNvSpPr/>
+          <p:nvPr/>
+        </p:nvSpPr>
+        <p:spPr>
+          <a:xfrm>
+            <a:off x="7475346" y="2337913"/>
+            <a:ext cx="896317" cy="796299"/>
+          </a:xfrm>
+          <a:prstGeom prst="ellipse">
+            <a:avLst/>
+          </a:prstGeom>
+          <a:solidFill>
+            <a:schemeClr val="bg1"/>
+          </a:solidFill>
+          <a:ln w="57150">
+            <a:solidFill>
+              <a:schemeClr val="tx1"/>
+            </a:solidFill>
+          </a:ln>
+        </p:spPr>
+        <p:style>
+          <a:lnRef idx="2">
+            <a:schemeClr val="accent1">
+              <a:shade val="50000"/>
+            </a:schemeClr>
+          </a:lnRef>
+          <a:fillRef idx="1">
+            <a:schemeClr val="accent1"/>
+          </a:fillRef>
+          <a:effectRef idx="0">
+            <a:schemeClr val="accent1"/>
+          </a:effectRef>
+          <a:fontRef idx="minor">
+            <a:schemeClr val="lt1"/>
+          </a:fontRef>
+        </p:style>
+        <p:txBody>
+          <a:bodyPr rtlCol="0" anchor="ctr"/>
+          <a:lstStyle/>
+          <a:p>
+            <a:pPr algn="ctr"/>
+            <a:r>
+              <a:rPr lang="en-GB" sz="1200" dirty="0">
+                <a:solidFill>
+                  <a:schemeClr val="tx1"/>
+                </a:solidFill>
+              </a:rPr>
+              <a:t>ERROR 3</a:t>
+            </a:r>
+          </a:p>
+        </p:txBody>
+      </p:sp>
+      <p:cxnSp>
+        <p:nvCxnSpPr>
+          <p:cNvPr id="27" name="Straight Arrow Connector 26">
+            <a:extLst>
+              <a:ext uri="{FF2B5EF4-FFF2-40B4-BE49-F238E27FC236}">
+                <a16:creationId xmlns:a16="http://schemas.microsoft.com/office/drawing/2014/main" id="{C6AC9FE4-BD97-4FDD-8DAB-420DFC19E81A}"/>
+              </a:ext>
+            </a:extLst>
+          </p:cNvPr>
+          <p:cNvCxnSpPr>
+            <a:cxnSpLocks/>
+            <a:stCxn id="26" idx="2"/>
+            <a:endCxn id="25" idx="3"/>
+          </p:cNvCxnSpPr>
+          <p:nvPr/>
+        </p:nvCxnSpPr>
+        <p:spPr>
+          <a:xfrm flipH="1">
+            <a:off x="6089236" y="2736063"/>
+            <a:ext cx="1386110" cy="6345"/>
+          </a:xfrm>
+          <a:prstGeom prst="straightConnector1">
+            <a:avLst/>
+          </a:prstGeom>
+          <a:ln w="57150">
+            <a:solidFill>
+              <a:schemeClr val="tx1"/>
+            </a:solidFill>
+            <a:tailEnd type="triangle"/>
+          </a:ln>
+        </p:spPr>
+        <p:style>
+          <a:lnRef idx="1">
+            <a:schemeClr val="accent1"/>
+          </a:lnRef>
+          <a:fillRef idx="0">
+            <a:schemeClr val="accent1"/>
+          </a:fillRef>
+          <a:effectRef idx="0">
+            <a:schemeClr val="accent1"/>
+          </a:effectRef>
+          <a:fontRef idx="minor">
+            <a:schemeClr val="tx1"/>
+          </a:fontRef>
+        </p:style>
+      </p:cxnSp>
+      <p:sp>
+        <p:nvSpPr>
+          <p:cNvPr id="28" name="TextBox 27">
+            <a:extLst>
+              <a:ext uri="{FF2B5EF4-FFF2-40B4-BE49-F238E27FC236}">
+                <a16:creationId xmlns:a16="http://schemas.microsoft.com/office/drawing/2014/main" id="{F7E6CC5E-3357-43BC-AB1E-4FA812416836}"/>
+              </a:ext>
+            </a:extLst>
+          </p:cNvPr>
+          <p:cNvSpPr txBox="1"/>
+          <p:nvPr/>
+        </p:nvSpPr>
+        <p:spPr>
+          <a:xfrm>
+            <a:off x="6799345" y="3615726"/>
+            <a:ext cx="149764" cy="276999"/>
+          </a:xfrm>
+          <a:prstGeom prst="rect">
+            <a:avLst/>
+          </a:prstGeom>
+          <a:solidFill>
+            <a:schemeClr val="bg1"/>
+          </a:solidFill>
+          <a:ln w="57150">
+            <a:noFill/>
+          </a:ln>
+        </p:spPr>
+        <p:txBody>
+          <a:bodyPr wrap="square" rtlCol="0">
+            <a:spAutoFit/>
+          </a:bodyPr>
+          <a:lstStyle/>
+          <a:p>
+            <a:r>
+              <a:rPr lang="en-GB" sz="1200" dirty="0"/>
+              <a:t>1</a:t>
+            </a:r>
+          </a:p>
+        </p:txBody>
+      </p:sp>
+      <p:cxnSp>
+        <p:nvCxnSpPr>
+          <p:cNvPr id="29" name="Connector: Curved 28">
+            <a:extLst>
+              <a:ext uri="{FF2B5EF4-FFF2-40B4-BE49-F238E27FC236}">
+                <a16:creationId xmlns:a16="http://schemas.microsoft.com/office/drawing/2014/main" id="{A113E1FA-9101-4526-8C88-35C447D8349C}"/>
+              </a:ext>
+            </a:extLst>
+          </p:cNvPr>
+          <p:cNvCxnSpPr>
+            <a:cxnSpLocks/>
+            <a:stCxn id="26" idx="6"/>
+            <a:endCxn id="26" idx="5"/>
+          </p:cNvCxnSpPr>
+          <p:nvPr/>
+        </p:nvCxnSpPr>
+        <p:spPr>
+          <a:xfrm flipH="1">
+            <a:off x="8240400" y="2736063"/>
+            <a:ext cx="131263" cy="281534"/>
+          </a:xfrm>
+          <a:prstGeom prst="curvedConnector4">
+            <a:avLst>
+              <a:gd name="adj1" fmla="val -174154"/>
+              <a:gd name="adj2" fmla="val 140045"/>
+            </a:avLst>
+          </a:prstGeom>
+          <a:ln w="38100">
+            <a:solidFill>
+              <a:schemeClr val="tx1"/>
+            </a:solidFill>
+            <a:headEnd type="triangle"/>
+            <a:tailEnd type="triangle"/>
+          </a:ln>
+        </p:spPr>
+        <p:style>
+          <a:lnRef idx="1">
+            <a:schemeClr val="accent1"/>
+          </a:lnRef>
+          <a:fillRef idx="0">
+            <a:schemeClr val="accent1"/>
+          </a:fillRef>
+          <a:effectRef idx="0">
+            <a:schemeClr val="accent1"/>
+          </a:effectRef>
+          <a:fontRef idx="minor">
+            <a:schemeClr val="tx1"/>
+          </a:fontRef>
+        </p:style>
+      </p:cxnSp>
+      <p:cxnSp>
+        <p:nvCxnSpPr>
+          <p:cNvPr id="30" name="Straight Arrow Connector 29">
+            <a:extLst>
+              <a:ext uri="{FF2B5EF4-FFF2-40B4-BE49-F238E27FC236}">
+                <a16:creationId xmlns:a16="http://schemas.microsoft.com/office/drawing/2014/main" id="{263412E1-6802-46B8-9144-8CB4EEA89B1C}"/>
+              </a:ext>
+            </a:extLst>
+          </p:cNvPr>
+          <p:cNvCxnSpPr>
+            <a:cxnSpLocks/>
+            <a:stCxn id="5" idx="6"/>
+            <a:endCxn id="25" idx="1"/>
+          </p:cNvCxnSpPr>
+          <p:nvPr/>
+        </p:nvCxnSpPr>
+        <p:spPr>
+          <a:xfrm>
+            <a:off x="3120326" y="2041902"/>
+            <a:ext cx="2030278" cy="700506"/>
+          </a:xfrm>
+          <a:prstGeom prst="straightConnector1">
+            <a:avLst/>
+          </a:prstGeom>
+          <a:ln w="57150">
+            <a:solidFill>
+              <a:schemeClr val="tx1"/>
+            </a:solidFill>
+            <a:tailEnd type="triangle"/>
+          </a:ln>
+        </p:spPr>
+        <p:style>
+          <a:lnRef idx="1">
+            <a:schemeClr val="accent1"/>
+          </a:lnRef>
+          <a:fillRef idx="0">
+            <a:schemeClr val="accent1"/>
+          </a:fillRef>
+          <a:effectRef idx="0">
+            <a:schemeClr val="accent1"/>
+          </a:effectRef>
+          <a:fontRef idx="minor">
+            <a:schemeClr val="tx1"/>
+          </a:fontRef>
+        </p:style>
+      </p:cxnSp>
+      <p:sp>
+        <p:nvSpPr>
+          <p:cNvPr id="31" name="TextBox 30">
+            <a:extLst>
+              <a:ext uri="{FF2B5EF4-FFF2-40B4-BE49-F238E27FC236}">
+                <a16:creationId xmlns:a16="http://schemas.microsoft.com/office/drawing/2014/main" id="{4FC6B636-5ACA-4225-9269-415EBF44ED12}"/>
+              </a:ext>
+            </a:extLst>
+          </p:cNvPr>
+          <p:cNvSpPr txBox="1"/>
+          <p:nvPr/>
+        </p:nvSpPr>
+        <p:spPr>
+          <a:xfrm>
+            <a:off x="3946142" y="2051305"/>
+            <a:ext cx="301686" cy="369332"/>
+          </a:xfrm>
+          <a:prstGeom prst="rect">
+            <a:avLst/>
+          </a:prstGeom>
+          <a:noFill/>
+          <a:ln w="57150">
+            <a:noFill/>
+          </a:ln>
+        </p:spPr>
+        <p:txBody>
+          <a:bodyPr wrap="none" rtlCol="0">
+            <a:spAutoFit/>
+          </a:bodyPr>
+          <a:lstStyle/>
+          <a:p>
+            <a:r>
+              <a:rPr lang="en-GB" dirty="0"/>
+              <a:t>1</a:t>
+            </a:r>
+          </a:p>
+        </p:txBody>
+      </p:sp>
+      <p:sp>
+        <p:nvSpPr>
+          <p:cNvPr id="32" name="Rectangle 31">
+            <a:extLst>
+              <a:ext uri="{FF2B5EF4-FFF2-40B4-BE49-F238E27FC236}">
+                <a16:creationId xmlns:a16="http://schemas.microsoft.com/office/drawing/2014/main" id="{C0ED71EA-4D6D-42AB-B272-39E33DD09C9D}"/>
+              </a:ext>
+            </a:extLst>
+          </p:cNvPr>
+          <p:cNvSpPr/>
+          <p:nvPr/>
+        </p:nvSpPr>
+        <p:spPr>
+          <a:xfrm>
+            <a:off x="5176225" y="3504085"/>
+            <a:ext cx="938632" cy="727055"/>
+          </a:xfrm>
+          <a:prstGeom prst="rect">
+            <a:avLst/>
+          </a:prstGeom>
+          <a:solidFill>
+            <a:schemeClr val="bg1"/>
+          </a:solidFill>
+          <a:ln w="57150">
+            <a:solidFill>
+              <a:schemeClr val="tx1"/>
+            </a:solidFill>
+          </a:ln>
+        </p:spPr>
+        <p:style>
+          <a:lnRef idx="2">
+            <a:schemeClr val="accent1">
+              <a:shade val="50000"/>
+            </a:schemeClr>
+          </a:lnRef>
+          <a:fillRef idx="1">
+            <a:schemeClr val="accent1"/>
+          </a:fillRef>
+          <a:effectRef idx="0">
+            <a:schemeClr val="accent1"/>
+          </a:effectRef>
+          <a:fontRef idx="minor">
+            <a:schemeClr val="lt1"/>
+          </a:fontRef>
+        </p:style>
+        <p:txBody>
+          <a:bodyPr rtlCol="0" anchor="ctr"/>
+          <a:lstStyle/>
+          <a:p>
+            <a:pPr algn="ctr"/>
+            <a:r>
+              <a:rPr lang="en-GB" sz="1200" dirty="0">
+                <a:solidFill>
+                  <a:schemeClr val="tx1"/>
+                </a:solidFill>
+              </a:rPr>
+              <a:t>SCORE 4</a:t>
+            </a:r>
+          </a:p>
+        </p:txBody>
+      </p:sp>
+      <p:sp>
+        <p:nvSpPr>
+          <p:cNvPr id="33" name="Oval 32">
+            <a:extLst>
+              <a:ext uri="{FF2B5EF4-FFF2-40B4-BE49-F238E27FC236}">
+                <a16:creationId xmlns:a16="http://schemas.microsoft.com/office/drawing/2014/main" id="{866C684F-166E-4E88-8DEE-CC355766C94A}"/>
+              </a:ext>
+            </a:extLst>
+          </p:cNvPr>
+          <p:cNvSpPr/>
+          <p:nvPr/>
+        </p:nvSpPr>
+        <p:spPr>
+          <a:xfrm>
+            <a:off x="7475346" y="3463580"/>
+            <a:ext cx="896317" cy="796299"/>
+          </a:xfrm>
+          <a:prstGeom prst="ellipse">
+            <a:avLst/>
+          </a:prstGeom>
+          <a:solidFill>
+            <a:schemeClr val="bg1"/>
+          </a:solidFill>
+          <a:ln w="57150">
+            <a:solidFill>
+              <a:schemeClr val="tx1"/>
+            </a:solidFill>
+          </a:ln>
+        </p:spPr>
+        <p:style>
+          <a:lnRef idx="2">
+            <a:schemeClr val="accent1">
+              <a:shade val="50000"/>
+            </a:schemeClr>
+          </a:lnRef>
+          <a:fillRef idx="1">
+            <a:schemeClr val="accent1"/>
+          </a:fillRef>
+          <a:effectRef idx="0">
+            <a:schemeClr val="accent1"/>
+          </a:effectRef>
+          <a:fontRef idx="minor">
+            <a:schemeClr val="lt1"/>
+          </a:fontRef>
+        </p:style>
+        <p:txBody>
+          <a:bodyPr rtlCol="0" anchor="ctr"/>
+          <a:lstStyle/>
+          <a:p>
+            <a:pPr algn="ctr"/>
+            <a:r>
+              <a:rPr lang="en-GB" sz="1200" dirty="0">
+                <a:solidFill>
+                  <a:schemeClr val="tx1"/>
+                </a:solidFill>
+              </a:rPr>
+              <a:t>ERROR 4</a:t>
+            </a:r>
+          </a:p>
+        </p:txBody>
+      </p:sp>
+      <p:cxnSp>
+        <p:nvCxnSpPr>
+          <p:cNvPr id="34" name="Straight Arrow Connector 33">
+            <a:extLst>
+              <a:ext uri="{FF2B5EF4-FFF2-40B4-BE49-F238E27FC236}">
+                <a16:creationId xmlns:a16="http://schemas.microsoft.com/office/drawing/2014/main" id="{C27473C8-004B-4A5D-853F-2DFC307AD3CF}"/>
+              </a:ext>
+            </a:extLst>
+          </p:cNvPr>
+          <p:cNvCxnSpPr>
+            <a:stCxn id="33" idx="2"/>
+            <a:endCxn id="32" idx="3"/>
+          </p:cNvCxnSpPr>
+          <p:nvPr/>
+        </p:nvCxnSpPr>
+        <p:spPr>
+          <a:xfrm flipH="1">
+            <a:off x="6114857" y="3861730"/>
+            <a:ext cx="1360489" cy="5883"/>
+          </a:xfrm>
+          <a:prstGeom prst="straightConnector1">
+            <a:avLst/>
+          </a:prstGeom>
+          <a:ln w="57150">
+            <a:solidFill>
+              <a:schemeClr val="tx1"/>
+            </a:solidFill>
+            <a:tailEnd type="triangle"/>
+          </a:ln>
+        </p:spPr>
+        <p:style>
+          <a:lnRef idx="1">
+            <a:schemeClr val="accent1"/>
+          </a:lnRef>
+          <a:fillRef idx="0">
+            <a:schemeClr val="accent1"/>
+          </a:fillRef>
+          <a:effectRef idx="0">
+            <a:schemeClr val="accent1"/>
+          </a:effectRef>
+          <a:fontRef idx="minor">
+            <a:schemeClr val="tx1"/>
+          </a:fontRef>
+        </p:style>
+      </p:cxnSp>
+      <p:sp>
+        <p:nvSpPr>
+          <p:cNvPr id="35" name="TextBox 34">
+            <a:extLst>
+              <a:ext uri="{FF2B5EF4-FFF2-40B4-BE49-F238E27FC236}">
+                <a16:creationId xmlns:a16="http://schemas.microsoft.com/office/drawing/2014/main" id="{119EF30C-83A6-4192-9D47-72F48B49954C}"/>
+              </a:ext>
+            </a:extLst>
+          </p:cNvPr>
+          <p:cNvSpPr txBox="1"/>
+          <p:nvPr/>
+        </p:nvSpPr>
+        <p:spPr>
+          <a:xfrm>
+            <a:off x="6746656" y="2409778"/>
+            <a:ext cx="149764" cy="276999"/>
+          </a:xfrm>
+          <a:prstGeom prst="rect">
+            <a:avLst/>
+          </a:prstGeom>
+          <a:solidFill>
+            <a:schemeClr val="bg1"/>
+          </a:solidFill>
+          <a:ln w="57150">
+            <a:noFill/>
+          </a:ln>
+        </p:spPr>
+        <p:txBody>
+          <a:bodyPr wrap="square" rtlCol="0">
+            <a:spAutoFit/>
+          </a:bodyPr>
+          <a:lstStyle/>
+          <a:p>
+            <a:r>
+              <a:rPr lang="en-GB" sz="1200" dirty="0"/>
+              <a:t>1</a:t>
+            </a:r>
+          </a:p>
+        </p:txBody>
+      </p:sp>
+      <p:cxnSp>
+        <p:nvCxnSpPr>
+          <p:cNvPr id="36" name="Connector: Curved 35">
+            <a:extLst>
+              <a:ext uri="{FF2B5EF4-FFF2-40B4-BE49-F238E27FC236}">
+                <a16:creationId xmlns:a16="http://schemas.microsoft.com/office/drawing/2014/main" id="{3A27A34F-2AD2-425B-8712-848F93AA7E48}"/>
+              </a:ext>
+            </a:extLst>
+          </p:cNvPr>
+          <p:cNvCxnSpPr>
+            <a:cxnSpLocks/>
+            <a:stCxn id="33" idx="7"/>
+            <a:endCxn id="33" idx="6"/>
+          </p:cNvCxnSpPr>
+          <p:nvPr/>
+        </p:nvCxnSpPr>
+        <p:spPr>
+          <a:xfrm rot="16200000" flipH="1">
+            <a:off x="8165263" y="3655331"/>
+            <a:ext cx="281535" cy="131263"/>
+          </a:xfrm>
+          <a:prstGeom prst="curvedConnector4">
+            <a:avLst>
+              <a:gd name="adj1" fmla="val -62064"/>
+              <a:gd name="adj2" fmla="val 274154"/>
+            </a:avLst>
+          </a:prstGeom>
+          <a:ln w="38100">
+            <a:solidFill>
+              <a:schemeClr val="tx1"/>
+            </a:solidFill>
+            <a:headEnd type="triangle"/>
+            <a:tailEnd type="triangle"/>
+          </a:ln>
+        </p:spPr>
+        <p:style>
+          <a:lnRef idx="1">
+            <a:schemeClr val="accent1"/>
+          </a:lnRef>
+          <a:fillRef idx="0">
+            <a:schemeClr val="accent1"/>
+          </a:fillRef>
+          <a:effectRef idx="0">
+            <a:schemeClr val="accent1"/>
+          </a:effectRef>
+          <a:fontRef idx="minor">
+            <a:schemeClr val="tx1"/>
+          </a:fontRef>
+        </p:style>
+      </p:cxnSp>
+      <p:cxnSp>
+        <p:nvCxnSpPr>
+          <p:cNvPr id="37" name="Straight Arrow Connector 36">
+            <a:extLst>
+              <a:ext uri="{FF2B5EF4-FFF2-40B4-BE49-F238E27FC236}">
+                <a16:creationId xmlns:a16="http://schemas.microsoft.com/office/drawing/2014/main" id="{85FC5E8C-FD27-4CB4-BD26-D8D931A7C228}"/>
+              </a:ext>
+            </a:extLst>
+          </p:cNvPr>
+          <p:cNvCxnSpPr>
+            <a:cxnSpLocks/>
+            <a:stCxn id="5" idx="6"/>
+            <a:endCxn id="32" idx="1"/>
+          </p:cNvCxnSpPr>
+          <p:nvPr/>
+        </p:nvCxnSpPr>
+        <p:spPr>
+          <a:xfrm>
+            <a:off x="3120326" y="2041902"/>
+            <a:ext cx="2055899" cy="1825711"/>
+          </a:xfrm>
+          <a:prstGeom prst="straightConnector1">
+            <a:avLst/>
+          </a:prstGeom>
+          <a:ln w="57150">
+            <a:solidFill>
+              <a:schemeClr val="tx1"/>
+            </a:solidFill>
+            <a:tailEnd type="triangle"/>
+          </a:ln>
+        </p:spPr>
+        <p:style>
+          <a:lnRef idx="1">
+            <a:schemeClr val="accent1"/>
+          </a:lnRef>
+          <a:fillRef idx="0">
+            <a:schemeClr val="accent1"/>
+          </a:fillRef>
+          <a:effectRef idx="0">
+            <a:schemeClr val="accent1"/>
+          </a:effectRef>
+          <a:fontRef idx="minor">
+            <a:schemeClr val="tx1"/>
+          </a:fontRef>
+        </p:style>
+      </p:cxnSp>
+      <p:sp>
+        <p:nvSpPr>
+          <p:cNvPr id="38" name="TextBox 37">
+            <a:extLst>
+              <a:ext uri="{FF2B5EF4-FFF2-40B4-BE49-F238E27FC236}">
+                <a16:creationId xmlns:a16="http://schemas.microsoft.com/office/drawing/2014/main" id="{D60E46CD-DDA3-4285-94A4-65325A352491}"/>
+              </a:ext>
+            </a:extLst>
+          </p:cNvPr>
+          <p:cNvSpPr txBox="1"/>
+          <p:nvPr/>
+        </p:nvSpPr>
+        <p:spPr>
+          <a:xfrm>
+            <a:off x="3897823" y="2920589"/>
+            <a:ext cx="301686" cy="369332"/>
+          </a:xfrm>
+          <a:prstGeom prst="rect">
+            <a:avLst/>
+          </a:prstGeom>
+          <a:noFill/>
+          <a:ln w="57150">
+            <a:noFill/>
+          </a:ln>
+        </p:spPr>
+        <p:txBody>
+          <a:bodyPr wrap="none" rtlCol="0">
+            <a:spAutoFit/>
+          </a:bodyPr>
+          <a:lstStyle/>
+          <a:p>
+            <a:r>
+              <a:rPr lang="en-GB" dirty="0"/>
+              <a:t>1</a:t>
+            </a:r>
+          </a:p>
+        </p:txBody>
+      </p:sp>
+      <p:sp>
+        <p:nvSpPr>
+          <p:cNvPr id="48" name="TextBox 47">
+            <a:extLst>
+              <a:ext uri="{FF2B5EF4-FFF2-40B4-BE49-F238E27FC236}">
+                <a16:creationId xmlns:a16="http://schemas.microsoft.com/office/drawing/2014/main" id="{2458814E-F4BE-43E0-843F-1722FB730029}"/>
+              </a:ext>
+            </a:extLst>
+          </p:cNvPr>
+          <p:cNvSpPr txBox="1"/>
+          <p:nvPr/>
+        </p:nvSpPr>
+        <p:spPr>
+          <a:xfrm>
+            <a:off x="6727283" y="1314969"/>
+            <a:ext cx="149764" cy="276999"/>
+          </a:xfrm>
+          <a:prstGeom prst="rect">
+            <a:avLst/>
+          </a:prstGeom>
+          <a:solidFill>
+            <a:schemeClr val="bg1"/>
+          </a:solidFill>
+          <a:ln w="57150">
+            <a:noFill/>
+          </a:ln>
+        </p:spPr>
+        <p:txBody>
+          <a:bodyPr wrap="square" rtlCol="0">
+            <a:spAutoFit/>
+          </a:bodyPr>
+          <a:lstStyle/>
+          <a:p>
+            <a:r>
+              <a:rPr lang="en-GB" sz="1200" dirty="0"/>
+              <a:t>1</a:t>
+            </a:r>
+          </a:p>
+        </p:txBody>
+      </p:sp>
+      <p:sp>
+        <p:nvSpPr>
+          <p:cNvPr id="49" name="TextBox 48">
+            <a:extLst>
+              <a:ext uri="{FF2B5EF4-FFF2-40B4-BE49-F238E27FC236}">
+                <a16:creationId xmlns:a16="http://schemas.microsoft.com/office/drawing/2014/main" id="{C51CD461-229E-4AC0-8A44-D0DD9BE9B44C}"/>
+              </a:ext>
+            </a:extLst>
+          </p:cNvPr>
+          <p:cNvSpPr txBox="1"/>
+          <p:nvPr/>
+        </p:nvSpPr>
+        <p:spPr>
+          <a:xfrm>
+            <a:off x="6727283" y="311142"/>
+            <a:ext cx="149764" cy="276999"/>
+          </a:xfrm>
+          <a:prstGeom prst="rect">
+            <a:avLst/>
+          </a:prstGeom>
+          <a:solidFill>
+            <a:schemeClr val="bg1"/>
+          </a:solidFill>
+          <a:ln w="57150">
+            <a:noFill/>
+          </a:ln>
+        </p:spPr>
+        <p:txBody>
+          <a:bodyPr wrap="square" rtlCol="0">
+            <a:spAutoFit/>
+          </a:bodyPr>
+          <a:lstStyle/>
+          <a:p>
+            <a:r>
+              <a:rPr lang="en-GB" sz="1200" dirty="0"/>
+              <a:t>1</a:t>
+            </a:r>
+          </a:p>
+        </p:txBody>
+      </p:sp>
+      <mc:AlternateContent xmlns:mc="http://schemas.openxmlformats.org/markup-compatibility/2006" xmlns:a14="http://schemas.microsoft.com/office/drawing/2010/main">
+        <mc:Choice Requires="a14">
+          <p:sp>
+            <p:nvSpPr>
+              <p:cNvPr id="58" name="TextBox 57">
+                <a:extLst>
+                  <a:ext uri="{FF2B5EF4-FFF2-40B4-BE49-F238E27FC236}">
+                    <a16:creationId xmlns:a16="http://schemas.microsoft.com/office/drawing/2014/main" id="{0367E6A1-BB76-40DF-9777-222D071BF658}"/>
+                  </a:ext>
+                </a:extLst>
+              </p:cNvPr>
+              <p:cNvSpPr txBox="1"/>
+              <p:nvPr/>
+            </p:nvSpPr>
+            <p:spPr>
+              <a:xfrm>
+                <a:off x="8551438" y="1811089"/>
+                <a:ext cx="244778" cy="373179"/>
+              </a:xfrm>
+              <a:prstGeom prst="rect">
+                <a:avLst/>
+              </a:prstGeom>
+              <a:noFill/>
+            </p:spPr>
+            <p:txBody>
+              <a:bodyPr wrap="square" rtlCol="0">
+                <a:spAutoFit/>
+              </a:bodyPr>
+              <a:lstStyle/>
+              <a:p>
+                <a:pPr/>
+                <a14:m>
+                  <m:oMathPara xmlns:m="http://schemas.openxmlformats.org/officeDocument/2006/math">
+                    <m:oMathParaPr>
+                      <m:jc m:val="centerGroup"/>
+                    </m:oMathParaPr>
+                    <m:oMath xmlns:m="http://schemas.openxmlformats.org/officeDocument/2006/math">
+                      <m:sSubSup>
+                        <m:sSubSupPr>
+                          <m:ctrlPr>
+                            <a:rPr lang="en-GB" i="1" smtClean="0">
+                              <a:latin typeface="Cambria Math" panose="02040503050406030204" pitchFamily="18" charset="0"/>
+                            </a:rPr>
+                          </m:ctrlPr>
+                        </m:sSubSupPr>
+                        <m:e>
+                          <m:r>
+                            <a:rPr lang="en-GB" i="1" smtClean="0">
+                              <a:latin typeface="Cambria Math" panose="02040503050406030204" pitchFamily="18" charset="0"/>
+                              <a:ea typeface="Cambria Math" panose="02040503050406030204" pitchFamily="18" charset="0"/>
+                            </a:rPr>
+                            <m:t>𝜎</m:t>
+                          </m:r>
+                        </m:e>
+                        <m:sub>
+                          <m:r>
+                            <a:rPr lang="en-GB" b="0" i="1" smtClean="0">
+                              <a:latin typeface="Cambria Math" panose="02040503050406030204" pitchFamily="18" charset="0"/>
+                            </a:rPr>
+                            <m:t>𝐸</m:t>
+                          </m:r>
+                        </m:sub>
+                        <m:sup>
+                          <m:r>
+                            <a:rPr lang="en-GB" b="0" i="1" smtClean="0">
+                              <a:latin typeface="Cambria Math" panose="02040503050406030204" pitchFamily="18" charset="0"/>
+                            </a:rPr>
+                            <m:t>2</m:t>
+                          </m:r>
+                        </m:sup>
+                      </m:sSubSup>
+                    </m:oMath>
+                  </m:oMathPara>
+                </a14:m>
+                <a:endParaRPr lang="en-GB" dirty="0"/>
+              </a:p>
+            </p:txBody>
+          </p:sp>
+        </mc:Choice>
+        <mc:Fallback xmlns="">
+          <p:sp>
+            <p:nvSpPr>
+              <p:cNvPr id="58" name="TextBox 57">
+                <a:extLst>
+                  <a:ext uri="{FF2B5EF4-FFF2-40B4-BE49-F238E27FC236}">
+                    <a16:creationId xmlns:a16="http://schemas.microsoft.com/office/drawing/2014/main" id="{0367E6A1-BB76-40DF-9777-222D071BF658}"/>
+                  </a:ext>
+                </a:extLst>
+              </p:cNvPr>
+              <p:cNvSpPr txBox="1">
+                <a:spLocks noRot="1" noChangeAspect="1" noMove="1" noResize="1" noEditPoints="1" noAdjustHandles="1" noChangeArrowheads="1" noChangeShapeType="1" noTextEdit="1"/>
+              </p:cNvSpPr>
+              <p:nvPr/>
+            </p:nvSpPr>
+            <p:spPr>
+              <a:xfrm>
+                <a:off x="8551438" y="1811089"/>
+                <a:ext cx="244778" cy="373179"/>
+              </a:xfrm>
+              <a:prstGeom prst="rect">
+                <a:avLst/>
+              </a:prstGeom>
+              <a:blipFill>
+                <a:blip r:embed="rId5"/>
+                <a:stretch>
+                  <a:fillRect r="-60000" b="-1639"/>
+                </a:stretch>
+              </a:blipFill>
+            </p:spPr>
+            <p:txBody>
+              <a:bodyPr/>
+              <a:lstStyle/>
+              <a:p>
+                <a:r>
+                  <a:rPr lang="en-GB">
+                    <a:noFill/>
+                  </a:rPr>
+                  <a:t> </a:t>
+                </a:r>
+              </a:p>
+            </p:txBody>
+          </p:sp>
+        </mc:Fallback>
+      </mc:AlternateContent>
+      <mc:AlternateContent xmlns:mc="http://schemas.openxmlformats.org/markup-compatibility/2006" xmlns:a14="http://schemas.microsoft.com/office/drawing/2010/main">
+        <mc:Choice Requires="a14">
+          <p:sp>
+            <p:nvSpPr>
+              <p:cNvPr id="59" name="TextBox 58">
+                <a:extLst>
+                  <a:ext uri="{FF2B5EF4-FFF2-40B4-BE49-F238E27FC236}">
+                    <a16:creationId xmlns:a16="http://schemas.microsoft.com/office/drawing/2014/main" id="{4165BF49-531A-4489-880F-2382AA7367C8}"/>
+                  </a:ext>
+                </a:extLst>
+              </p:cNvPr>
+              <p:cNvSpPr txBox="1"/>
+              <p:nvPr/>
+            </p:nvSpPr>
+            <p:spPr>
+              <a:xfrm>
+                <a:off x="8551438" y="3611977"/>
+                <a:ext cx="244778" cy="373179"/>
+              </a:xfrm>
+              <a:prstGeom prst="rect">
+                <a:avLst/>
+              </a:prstGeom>
+              <a:noFill/>
+            </p:spPr>
+            <p:txBody>
+              <a:bodyPr wrap="square" rtlCol="0">
+                <a:spAutoFit/>
+              </a:bodyPr>
+              <a:lstStyle/>
+              <a:p>
+                <a:pPr/>
+                <a14:m>
+                  <m:oMathPara xmlns:m="http://schemas.openxmlformats.org/officeDocument/2006/math">
+                    <m:oMathParaPr>
+                      <m:jc m:val="centerGroup"/>
+                    </m:oMathParaPr>
+                    <m:oMath xmlns:m="http://schemas.openxmlformats.org/officeDocument/2006/math">
+                      <m:sSubSup>
+                        <m:sSubSupPr>
+                          <m:ctrlPr>
+                            <a:rPr lang="en-GB" i="1" smtClean="0">
+                              <a:latin typeface="Cambria Math" panose="02040503050406030204" pitchFamily="18" charset="0"/>
+                            </a:rPr>
+                          </m:ctrlPr>
+                        </m:sSubSupPr>
+                        <m:e>
+                          <m:r>
+                            <a:rPr lang="en-GB" i="1" smtClean="0">
+                              <a:latin typeface="Cambria Math" panose="02040503050406030204" pitchFamily="18" charset="0"/>
+                              <a:ea typeface="Cambria Math" panose="02040503050406030204" pitchFamily="18" charset="0"/>
+                            </a:rPr>
+                            <m:t>𝜎</m:t>
+                          </m:r>
+                        </m:e>
+                        <m:sub>
+                          <m:r>
+                            <a:rPr lang="en-GB" b="0" i="1" smtClean="0">
+                              <a:latin typeface="Cambria Math" panose="02040503050406030204" pitchFamily="18" charset="0"/>
+                            </a:rPr>
+                            <m:t>𝐸</m:t>
+                          </m:r>
+                        </m:sub>
+                        <m:sup>
+                          <m:r>
+                            <a:rPr lang="en-GB" b="0" i="1" smtClean="0">
+                              <a:latin typeface="Cambria Math" panose="02040503050406030204" pitchFamily="18" charset="0"/>
+                            </a:rPr>
+                            <m:t>2</m:t>
+                          </m:r>
+                        </m:sup>
+                      </m:sSubSup>
+                    </m:oMath>
+                  </m:oMathPara>
+                </a14:m>
+                <a:endParaRPr lang="en-GB" dirty="0"/>
+              </a:p>
+            </p:txBody>
+          </p:sp>
+        </mc:Choice>
+        <mc:Fallback xmlns="">
+          <p:sp>
+            <p:nvSpPr>
+              <p:cNvPr id="59" name="TextBox 58">
+                <a:extLst>
+                  <a:ext uri="{FF2B5EF4-FFF2-40B4-BE49-F238E27FC236}">
+                    <a16:creationId xmlns:a16="http://schemas.microsoft.com/office/drawing/2014/main" id="{4165BF49-531A-4489-880F-2382AA7367C8}"/>
+                  </a:ext>
+                </a:extLst>
+              </p:cNvPr>
+              <p:cNvSpPr txBox="1">
+                <a:spLocks noRot="1" noChangeAspect="1" noMove="1" noResize="1" noEditPoints="1" noAdjustHandles="1" noChangeArrowheads="1" noChangeShapeType="1" noTextEdit="1"/>
+              </p:cNvSpPr>
+              <p:nvPr/>
+            </p:nvSpPr>
+            <p:spPr>
+              <a:xfrm>
+                <a:off x="8551438" y="3611977"/>
+                <a:ext cx="244778" cy="373179"/>
+              </a:xfrm>
+              <a:prstGeom prst="rect">
+                <a:avLst/>
+              </a:prstGeom>
+              <a:blipFill>
+                <a:blip r:embed="rId6"/>
+                <a:stretch>
+                  <a:fillRect r="-60000" b="-1639"/>
+                </a:stretch>
+              </a:blipFill>
+            </p:spPr>
+            <p:txBody>
+              <a:bodyPr/>
+              <a:lstStyle/>
+              <a:p>
+                <a:r>
+                  <a:rPr lang="en-GB">
+                    <a:noFill/>
+                  </a:rPr>
+                  <a:t> </a:t>
+                </a:r>
+              </a:p>
+            </p:txBody>
+          </p:sp>
+        </mc:Fallback>
+      </mc:AlternateContent>
+    </p:spTree>
+    <p:extLst>
+      <p:ext uri="{BB962C8B-B14F-4D97-AF65-F5344CB8AC3E}">
+        <p14:creationId xmlns:p14="http://schemas.microsoft.com/office/powerpoint/2010/main" val="3506502794"/>
+      </p:ext>
+    </p:extLst>
+  </p:cSld>
+  <p:clrMapOvr>
+    <a:masterClrMapping/>
+  </p:clrMapOvr>
+</p:sld>
+</file>
+
 <file path=ppt/theme/theme1.xml><?xml version="1.0" encoding="utf-8"?>
 <a:theme xmlns:a="http://schemas.openxmlformats.org/drawingml/2006/main" name="Office Theme">
   <a:themeElements>
